--- a/M&A/カンテサンス/お支払い設計のご提案_税負担の最適化_20261011.pptx
+++ b/M&A/カンテサンス/お支払い設計のご提案_税負担の最適化_20261011.pptx
@@ -947,7 +947,7 @@
                 <a:ea typeface="Cambria" pitchFamily="34" charset="-122"/>
                 <a:cs typeface="Cambria" pitchFamily="34" charset="-120"/>
               </a:rPr>
-              <a:t>お支払い総額は変えずに、双方の税負担を抑える設計</a:t>
+              <a:t>お支払い総額は変えずに、双方合計の税負担を下げる設計</a:t>
             </a:r>
             <a:endParaRPr lang="en-US" sz="2400" dirty="0"/>
           </a:p>
@@ -986,7 +986,7 @@
                 <a:ea typeface="Calibri" pitchFamily="34" charset="-122"/>
                 <a:cs typeface="Calibri" pitchFamily="34" charset="-120"/>
               </a:rPr>
-              <a:t>岸田様の手取りを守ることを前提に、会社側で損金にできる部分を「役員退職金」として設計させていただきたいと考えております。</a:t>
+              <a:t>報酬の前払い2.25億円を、株式対価ではなく決済時の役員退職金としてお支払いすることで、双方合計の税負担を約6,700万円下げられます。</a:t>
             </a:r>
             <a:endParaRPr lang="en-US" sz="1150" dirty="0"/>
           </a:p>
@@ -1001,11 +1001,11 @@
         <p:spPr>
           <a:xfrm>
             <a:off x="566928" y="1481328"/>
-            <a:ext cx="3593592" cy="749808"/>
+            <a:ext cx="3593592" cy="713232"/>
           </a:xfrm>
           <a:prstGeom prst="roundRect">
             <a:avLst>
-              <a:gd name="adj" fmla="val 6098"/>
+              <a:gd name="adj" fmla="val 6410"/>
             </a:avLst>
           </a:prstGeom>
           <a:solidFill>
@@ -1027,7 +1027,7 @@
         </p:nvSpPr>
         <p:spPr>
           <a:xfrm>
-            <a:off x="713232" y="1673352"/>
+            <a:off x="713232" y="1655064"/>
             <a:ext cx="365760" cy="365760"/>
           </a:xfrm>
           <a:prstGeom prst="ellipse">
@@ -1052,7 +1052,7 @@
         </p:nvSpPr>
         <p:spPr>
           <a:xfrm>
-            <a:off x="713232" y="1673352"/>
+            <a:off x="713232" y="1655064"/>
             <a:ext cx="365760" cy="365760"/>
           </a:xfrm>
           <a:prstGeom prst="rect">
@@ -1091,7 +1091,7 @@
         </p:nvSpPr>
         <p:spPr>
           <a:xfrm>
-            <a:off x="1207008" y="1572768"/>
+            <a:off x="1207008" y="1554480"/>
             <a:ext cx="2816352" cy="310896"/>
           </a:xfrm>
           <a:prstGeom prst="rect">
@@ -1130,8 +1130,8 @@
         </p:nvSpPr>
         <p:spPr>
           <a:xfrm>
-            <a:off x="1207008" y="1883664"/>
-            <a:ext cx="2816352" cy="274320"/>
+            <a:off x="1207008" y="1865376"/>
+            <a:ext cx="2816352" cy="256032"/>
           </a:xfrm>
           <a:prstGeom prst="rect">
             <a:avLst/>
@@ -1155,7 +1155,7 @@
                 <a:ea typeface="Calibri" pitchFamily="34" charset="-122"/>
                 <a:cs typeface="Calibri" pitchFamily="34" charset="-120"/>
               </a:rPr>
-              <a:t>10/9にお伝えした総額・条件の枠組みのままです</a:t>
+              <a:t>10/9の総額・条件の枠組みのままです</a:t>
             </a:r>
             <a:endParaRPr lang="en-US" sz="900" dirty="0"/>
           </a:p>
@@ -1170,11 +1170,11 @@
         <p:spPr>
           <a:xfrm>
             <a:off x="4297680" y="1481328"/>
-            <a:ext cx="3593592" cy="749808"/>
+            <a:ext cx="3593592" cy="713232"/>
           </a:xfrm>
           <a:prstGeom prst="roundRect">
             <a:avLst>
-              <a:gd name="adj" fmla="val 6098"/>
+              <a:gd name="adj" fmla="val 6410"/>
             </a:avLst>
           </a:prstGeom>
           <a:solidFill>
@@ -1196,7 +1196,7 @@
         </p:nvSpPr>
         <p:spPr>
           <a:xfrm>
-            <a:off x="4443984" y="1673352"/>
+            <a:off x="4443984" y="1655064"/>
             <a:ext cx="365760" cy="365760"/>
           </a:xfrm>
           <a:prstGeom prst="ellipse">
@@ -1221,7 +1221,7 @@
         </p:nvSpPr>
         <p:spPr>
           <a:xfrm>
-            <a:off x="4443984" y="1673352"/>
+            <a:off x="4443984" y="1655064"/>
             <a:ext cx="365760" cy="365760"/>
           </a:xfrm>
           <a:prstGeom prst="rect">
@@ -1260,7 +1260,7 @@
         </p:nvSpPr>
         <p:spPr>
           <a:xfrm>
-            <a:off x="4937760" y="1572768"/>
+            <a:off x="4937760" y="1554480"/>
             <a:ext cx="2816352" cy="310896"/>
           </a:xfrm>
           <a:prstGeom prst="rect">
@@ -1285,7 +1285,7 @@
                 <a:ea typeface="Calibri" pitchFamily="34" charset="-122"/>
                 <a:cs typeface="Calibri" pitchFamily="34" charset="-120"/>
               </a:rPr>
-              <a:t>岸田様の手取りは減らしません</a:t>
+              <a:t>双方合計の税負担を下げます</a:t>
             </a:r>
             <a:endParaRPr lang="en-US" sz="1250" dirty="0"/>
           </a:p>
@@ -1299,8 +1299,8 @@
         </p:nvSpPr>
         <p:spPr>
           <a:xfrm>
-            <a:off x="4937760" y="1883664"/>
-            <a:ext cx="2816352" cy="274320"/>
+            <a:off x="4937760" y="1865376"/>
+            <a:ext cx="2816352" cy="256032"/>
           </a:xfrm>
           <a:prstGeom prst="rect">
             <a:avLst/>
@@ -1324,7 +1324,7 @@
                 <a:ea typeface="Calibri" pitchFamily="34" charset="-122"/>
                 <a:cs typeface="Calibri" pitchFamily="34" charset="-120"/>
               </a:rPr>
-              <a:t>株式対価でお受け取りの場合と同水準を確保</a:t>
+              <a:t>退職所得（課税は2分の1）の仕組みを活用</a:t>
             </a:r>
             <a:endParaRPr lang="en-US" sz="900" dirty="0"/>
           </a:p>
@@ -1339,11 +1339,11 @@
         <p:spPr>
           <a:xfrm>
             <a:off x="8028432" y="1481328"/>
-            <a:ext cx="3593592" cy="749808"/>
+            <a:ext cx="3593592" cy="713232"/>
           </a:xfrm>
           <a:prstGeom prst="roundRect">
             <a:avLst>
-              <a:gd name="adj" fmla="val 6098"/>
+              <a:gd name="adj" fmla="val 6410"/>
             </a:avLst>
           </a:prstGeom>
           <a:solidFill>
@@ -1365,7 +1365,7 @@
         </p:nvSpPr>
         <p:spPr>
           <a:xfrm>
-            <a:off x="8174736" y="1673352"/>
+            <a:off x="8174736" y="1655064"/>
             <a:ext cx="365760" cy="365760"/>
           </a:xfrm>
           <a:prstGeom prst="ellipse">
@@ -1390,7 +1390,7 @@
         </p:nvSpPr>
         <p:spPr>
           <a:xfrm>
-            <a:off x="8174736" y="1673352"/>
+            <a:off x="8174736" y="1655064"/>
             <a:ext cx="365760" cy="365760"/>
           </a:xfrm>
           <a:prstGeom prst="rect">
@@ -1429,7 +1429,7 @@
         </p:nvSpPr>
         <p:spPr>
           <a:xfrm>
-            <a:off x="8668512" y="1572768"/>
+            <a:off x="8668512" y="1554480"/>
             <a:ext cx="2816352" cy="310896"/>
           </a:xfrm>
           <a:prstGeom prst="rect">
@@ -1454,7 +1454,7 @@
                 <a:ea typeface="Calibri" pitchFamily="34" charset="-122"/>
                 <a:cs typeface="Calibri" pitchFamily="34" charset="-120"/>
               </a:rPr>
-              <a:t>損金にできる部分を退職金に</a:t>
+              <a:t>効果とリスクを分け合います</a:t>
             </a:r>
             <a:endParaRPr lang="en-US" sz="1250" dirty="0"/>
           </a:p>
@@ -1468,8 +1468,8 @@
         </p:nvSpPr>
         <p:spPr>
           <a:xfrm>
-            <a:off x="8668512" y="1883664"/>
-            <a:ext cx="2816352" cy="274320"/>
+            <a:off x="8668512" y="1865376"/>
+            <a:ext cx="2816352" cy="256032"/>
           </a:xfrm>
           <a:prstGeom prst="rect">
             <a:avLst/>
@@ -1493,7 +1493,7 @@
                 <a:ea typeface="Calibri" pitchFamily="34" charset="-122"/>
                 <a:cs typeface="Calibri" pitchFamily="34" charset="-120"/>
               </a:rPr>
-              <a:t>金額・時期は双方の税理士の確認のうえ決定</a:t>
+              <a:t>税務上のリスクも双方で負担します</a:t>
             </a:r>
             <a:endParaRPr lang="en-US" sz="900" dirty="0"/>
           </a:p>
@@ -1507,8 +1507,8 @@
         </p:nvSpPr>
         <p:spPr>
           <a:xfrm>
-            <a:off x="566928" y="2432304"/>
-            <a:ext cx="6446520" cy="256032"/>
+            <a:off x="566928" y="2377440"/>
+            <a:ext cx="6812280" cy="256032"/>
           </a:xfrm>
           <a:prstGeom prst="rect">
             <a:avLst/>
@@ -1532,7 +1532,7 @@
                 <a:ea typeface="Calibri" pitchFamily="34" charset="-122"/>
                 <a:cs typeface="Calibri" pitchFamily="34" charset="-120"/>
               </a:rPr>
-              <a:t>役員退職金：支給時期による違い（目安）</a:t>
+              <a:t>報酬の前払い2.25億円：払い方による違い</a:t>
             </a:r>
             <a:endParaRPr lang="en-US" sz="1150" dirty="0"/>
           </a:p>
@@ -1553,1291 +1553,20 @@
           </p:nvPr>
         </p:nvGraphicFramePr>
         <p:xfrm>
-          <a:off x="566928" y="2724912"/>
-          <a:ext cx="6446520" cy="914400"/>
+          <a:off x="566928" y="2670048"/>
+          <a:ext cx="6812280" cy="914400"/>
         </p:xfrm>
         <a:graphic>
           <a:graphicData uri="http://schemas.openxmlformats.org/drawingml/2006/table">
             <a:tbl>
               <a:tblPr/>
               <a:tblGrid>
-                <a:gridCol w="1234440"/>
                 <a:gridCol w="1874520"/>
-                <a:gridCol w="1097280"/>
-                <a:gridCol w="1051560"/>
-                <a:gridCol w="1188720"/>
+                <a:gridCol w="1691640"/>
+                <a:gridCol w="1508760"/>
+                <a:gridCol w="1737360"/>
               </a:tblGrid>
-              <a:tr h="457200">
-                <a:tc>
-                  <a:txBody>
-                    <a:bodyPr/>
-                    <a:lstStyle/>
-                    <a:p>
-                      <a:pPr indent="0" marL="0">
-                        <a:buNone/>
-                      </a:pPr>
-                      <a:r>
-                        <a:rPr lang="en-US" sz="950" b="1" dirty="0">
-                          <a:solidFill>
-                            <a:srgbClr val="FFFFFF"/>
-                          </a:solidFill>
-                          <a:latin typeface="Calibri" pitchFamily="34" charset="0"/>
-                          <a:ea typeface="Calibri" pitchFamily="34" charset="-122"/>
-                          <a:cs typeface="Calibri" pitchFamily="34" charset="-120"/>
-                        </a:rPr>
-                        <a:t>支給時期</a:t>
-                      </a:r>
-                      <a:endParaRPr lang="en-US" sz="950" dirty="0">
-                        <a:latin typeface="Calibri" charset="0"/>
-                        <a:ea typeface="Calibri" charset="0"/>
-                        <a:cs typeface="Calibri" charset="0"/>
-                      </a:endParaRPr>
-                    </a:p>
-                  </a:txBody>
-                  <a:tcPr marL="63500" marR="63500" marT="38100" marB="38100" anchor="ctr">
-                    <a:lnL w="6350" cap="flat" cmpd="sng" algn="ctr">
-                      <a:solidFill>
-                        <a:srgbClr val="E4DADD"/>
-                      </a:solidFill>
-                      <a:prstDash val="solid"/>
-                      <a:round/>
-                      <a:headEnd type="none" w="med" len="med"/>
-                      <a:tailEnd type="none" w="med" len="med"/>
-                    </a:lnL>
-                    <a:lnR w="6350" cap="flat" cmpd="sng" algn="ctr">
-                      <a:solidFill>
-                        <a:srgbClr val="E4DADD"/>
-                      </a:solidFill>
-                      <a:prstDash val="solid"/>
-                      <a:round/>
-                      <a:headEnd type="none" w="med" len="med"/>
-                      <a:tailEnd type="none" w="med" len="med"/>
-                    </a:lnR>
-                    <a:lnT w="6350" cap="flat" cmpd="sng" algn="ctr">
-                      <a:solidFill>
-                        <a:srgbClr val="E4DADD"/>
-                      </a:solidFill>
-                      <a:prstDash val="solid"/>
-                      <a:round/>
-                      <a:headEnd type="none" w="med" len="med"/>
-                      <a:tailEnd type="none" w="med" len="med"/>
-                    </a:lnT>
-                    <a:lnB w="6350" cap="flat" cmpd="sng" algn="ctr">
-                      <a:solidFill>
-                        <a:srgbClr val="E4DADD"/>
-                      </a:solidFill>
-                      <a:prstDash val="solid"/>
-                      <a:round/>
-                      <a:headEnd type="none" w="med" len="med"/>
-                      <a:tailEnd type="none" w="med" len="med"/>
-                    </a:lnB>
-                    <a:solidFill>
-                      <a:srgbClr val="6D2E46"/>
-                    </a:solidFill>
-                  </a:tcPr>
-                </a:tc>
-                <a:tc>
-                  <a:txBody>
-                    <a:bodyPr/>
-                    <a:lstStyle/>
-                    <a:p>
-                      <a:pPr indent="0" marL="0">
-                        <a:buNone/>
-                      </a:pPr>
-                      <a:r>
-                        <a:rPr lang="en-US" sz="950" b="1" dirty="0">
-                          <a:solidFill>
-                            <a:srgbClr val="FFFFFF"/>
-                          </a:solidFill>
-                          <a:latin typeface="Calibri" pitchFamily="34" charset="0"/>
-                          <a:ea typeface="Calibri" pitchFamily="34" charset="-122"/>
-                          <a:cs typeface="Calibri" pitchFamily="34" charset="-120"/>
-                        </a:rPr>
-                        <a:t>計算の目安</a:t>
-                      </a:r>
-                      <a:endParaRPr lang="en-US" sz="950" dirty="0">
-                        <a:latin typeface="Calibri" charset="0"/>
-                        <a:ea typeface="Calibri" charset="0"/>
-                        <a:cs typeface="Calibri" charset="0"/>
-                      </a:endParaRPr>
-                    </a:p>
-                  </a:txBody>
-                  <a:tcPr marL="63500" marR="63500" marT="38100" marB="38100" anchor="ctr">
-                    <a:lnL w="6350" cap="flat" cmpd="sng" algn="ctr">
-                      <a:solidFill>
-                        <a:srgbClr val="E4DADD"/>
-                      </a:solidFill>
-                      <a:prstDash val="solid"/>
-                      <a:round/>
-                      <a:headEnd type="none" w="med" len="med"/>
-                      <a:tailEnd type="none" w="med" len="med"/>
-                    </a:lnL>
-                    <a:lnR w="6350" cap="flat" cmpd="sng" algn="ctr">
-                      <a:solidFill>
-                        <a:srgbClr val="E4DADD"/>
-                      </a:solidFill>
-                      <a:prstDash val="solid"/>
-                      <a:round/>
-                      <a:headEnd type="none" w="med" len="med"/>
-                      <a:tailEnd type="none" w="med" len="med"/>
-                    </a:lnR>
-                    <a:lnT w="6350" cap="flat" cmpd="sng" algn="ctr">
-                      <a:solidFill>
-                        <a:srgbClr val="E4DADD"/>
-                      </a:solidFill>
-                      <a:prstDash val="solid"/>
-                      <a:round/>
-                      <a:headEnd type="none" w="med" len="med"/>
-                      <a:tailEnd type="none" w="med" len="med"/>
-                    </a:lnT>
-                    <a:lnB w="6350" cap="flat" cmpd="sng" algn="ctr">
-                      <a:solidFill>
-                        <a:srgbClr val="E4DADD"/>
-                      </a:solidFill>
-                      <a:prstDash val="solid"/>
-                      <a:round/>
-                      <a:headEnd type="none" w="med" len="med"/>
-                      <a:tailEnd type="none" w="med" len="med"/>
-                    </a:lnB>
-                    <a:solidFill>
-                      <a:srgbClr val="6D2E46"/>
-                    </a:solidFill>
-                  </a:tcPr>
-                </a:tc>
-                <a:tc>
-                  <a:txBody>
-                    <a:bodyPr/>
-                    <a:lstStyle/>
-                    <a:p>
-                      <a:pPr algn="r" indent="0" marL="0">
-                        <a:buNone/>
-                      </a:pPr>
-                      <a:r>
-                        <a:rPr lang="en-US" sz="950" b="1" dirty="0">
-                          <a:solidFill>
-                            <a:srgbClr val="FFFFFF"/>
-                          </a:solidFill>
-                          <a:latin typeface="Calibri" pitchFamily="34" charset="0"/>
-                          <a:ea typeface="Calibri" pitchFamily="34" charset="-122"/>
-                          <a:cs typeface="Calibri" pitchFamily="34" charset="-120"/>
-                        </a:rPr>
-                        <a:t>退職金の目安</a:t>
-                      </a:r>
-                      <a:endParaRPr lang="en-US" sz="950" dirty="0">
-                        <a:latin typeface="Calibri" charset="0"/>
-                        <a:ea typeface="Calibri" charset="0"/>
-                        <a:cs typeface="Calibri" charset="0"/>
-                      </a:endParaRPr>
-                    </a:p>
-                  </a:txBody>
-                  <a:tcPr marL="63500" marR="63500" marT="38100" marB="38100" anchor="ctr">
-                    <a:lnL w="6350" cap="flat" cmpd="sng" algn="ctr">
-                      <a:solidFill>
-                        <a:srgbClr val="E4DADD"/>
-                      </a:solidFill>
-                      <a:prstDash val="solid"/>
-                      <a:round/>
-                      <a:headEnd type="none" w="med" len="med"/>
-                      <a:tailEnd type="none" w="med" len="med"/>
-                    </a:lnL>
-                    <a:lnR w="6350" cap="flat" cmpd="sng" algn="ctr">
-                      <a:solidFill>
-                        <a:srgbClr val="E4DADD"/>
-                      </a:solidFill>
-                      <a:prstDash val="solid"/>
-                      <a:round/>
-                      <a:headEnd type="none" w="med" len="med"/>
-                      <a:tailEnd type="none" w="med" len="med"/>
-                    </a:lnR>
-                    <a:lnT w="6350" cap="flat" cmpd="sng" algn="ctr">
-                      <a:solidFill>
-                        <a:srgbClr val="E4DADD"/>
-                      </a:solidFill>
-                      <a:prstDash val="solid"/>
-                      <a:round/>
-                      <a:headEnd type="none" w="med" len="med"/>
-                      <a:tailEnd type="none" w="med" len="med"/>
-                    </a:lnT>
-                    <a:lnB w="6350" cap="flat" cmpd="sng" algn="ctr">
-                      <a:solidFill>
-                        <a:srgbClr val="E4DADD"/>
-                      </a:solidFill>
-                      <a:prstDash val="solid"/>
-                      <a:round/>
-                      <a:headEnd type="none" w="med" len="med"/>
-                      <a:tailEnd type="none" w="med" len="med"/>
-                    </a:lnB>
-                    <a:solidFill>
-                      <a:srgbClr val="6D2E46"/>
-                    </a:solidFill>
-                  </a:tcPr>
-                </a:tc>
-                <a:tc>
-                  <a:txBody>
-                    <a:bodyPr/>
-                    <a:lstStyle/>
-                    <a:p>
-                      <a:pPr algn="r" indent="0" marL="0">
-                        <a:buNone/>
-                      </a:pPr>
-                      <a:r>
-                        <a:rPr lang="en-US" sz="950" b="1" dirty="0">
-                          <a:solidFill>
-                            <a:srgbClr val="FFFFFF"/>
-                          </a:solidFill>
-                          <a:latin typeface="Calibri" pitchFamily="34" charset="0"/>
-                          <a:ea typeface="Calibri" pitchFamily="34" charset="-122"/>
-                          <a:cs typeface="Calibri" pitchFamily="34" charset="-120"/>
-                        </a:rPr>
-                        <a:t>会社の節税</a:t>
-                      </a:r>
-                      <a:endParaRPr lang="en-US" sz="950" dirty="0">
-                        <a:latin typeface="Calibri" charset="0"/>
-                        <a:ea typeface="Calibri" charset="0"/>
-                        <a:cs typeface="Calibri" charset="0"/>
-                      </a:endParaRPr>
-                    </a:p>
-                  </a:txBody>
-                  <a:tcPr marL="63500" marR="63500" marT="38100" marB="38100" anchor="ctr">
-                    <a:lnL w="6350" cap="flat" cmpd="sng" algn="ctr">
-                      <a:solidFill>
-                        <a:srgbClr val="E4DADD"/>
-                      </a:solidFill>
-                      <a:prstDash val="solid"/>
-                      <a:round/>
-                      <a:headEnd type="none" w="med" len="med"/>
-                      <a:tailEnd type="none" w="med" len="med"/>
-                    </a:lnL>
-                    <a:lnR w="6350" cap="flat" cmpd="sng" algn="ctr">
-                      <a:solidFill>
-                        <a:srgbClr val="E4DADD"/>
-                      </a:solidFill>
-                      <a:prstDash val="solid"/>
-                      <a:round/>
-                      <a:headEnd type="none" w="med" len="med"/>
-                      <a:tailEnd type="none" w="med" len="med"/>
-                    </a:lnR>
-                    <a:lnT w="6350" cap="flat" cmpd="sng" algn="ctr">
-                      <a:solidFill>
-                        <a:srgbClr val="E4DADD"/>
-                      </a:solidFill>
-                      <a:prstDash val="solid"/>
-                      <a:round/>
-                      <a:headEnd type="none" w="med" len="med"/>
-                      <a:tailEnd type="none" w="med" len="med"/>
-                    </a:lnT>
-                    <a:lnB w="6350" cap="flat" cmpd="sng" algn="ctr">
-                      <a:solidFill>
-                        <a:srgbClr val="E4DADD"/>
-                      </a:solidFill>
-                      <a:prstDash val="solid"/>
-                      <a:round/>
-                      <a:headEnd type="none" w="med" len="med"/>
-                      <a:tailEnd type="none" w="med" len="med"/>
-                    </a:lnB>
-                    <a:solidFill>
-                      <a:srgbClr val="6D2E46"/>
-                    </a:solidFill>
-                  </a:tcPr>
-                </a:tc>
-                <a:tc>
-                  <a:txBody>
-                    <a:bodyPr/>
-                    <a:lstStyle/>
-                    <a:p>
-                      <a:pPr algn="ctr" indent="0" marL="0">
-                        <a:buNone/>
-                      </a:pPr>
-                      <a:r>
-                        <a:rPr lang="en-US" sz="950" b="1" dirty="0">
-                          <a:solidFill>
-                            <a:srgbClr val="FFFFFF"/>
-                          </a:solidFill>
-                          <a:latin typeface="Calibri" pitchFamily="34" charset="0"/>
-                          <a:ea typeface="Calibri" pitchFamily="34" charset="-122"/>
-                          <a:cs typeface="Calibri" pitchFamily="34" charset="-120"/>
-                        </a:rPr>
-                        <a:t>岸田様の税負担</a:t>
-                      </a:r>
-                      <a:endParaRPr lang="en-US" sz="950" dirty="0">
-                        <a:latin typeface="Calibri" charset="0"/>
-                        <a:ea typeface="Calibri" charset="0"/>
-                        <a:cs typeface="Calibri" charset="0"/>
-                      </a:endParaRPr>
-                    </a:p>
-                    <a:p>
-                      <a:pPr algn="ctr" indent="0" marL="0">
-                        <a:buNone/>
-                      </a:pPr>
-                      <a:r>
-                        <a:rPr lang="en-US" sz="950" b="1" dirty="0">
-                          <a:solidFill>
-                            <a:srgbClr val="FFFFFF"/>
-                          </a:solidFill>
-                          <a:latin typeface="Calibri" pitchFamily="34" charset="0"/>
-                          <a:ea typeface="Calibri" pitchFamily="34" charset="-122"/>
-                          <a:cs typeface="Calibri" pitchFamily="34" charset="-120"/>
-                        </a:rPr>
-                        <a:t>（株式対価比）</a:t>
-                      </a:r>
-                      <a:endParaRPr lang="en-US" sz="950" dirty="0">
-                        <a:latin typeface="Calibri" charset="0"/>
-                        <a:ea typeface="Calibri" charset="0"/>
-                        <a:cs typeface="Calibri" charset="0"/>
-                      </a:endParaRPr>
-                    </a:p>
-                  </a:txBody>
-                  <a:tcPr marL="63500" marR="63500" marT="38100" marB="38100" anchor="ctr">
-                    <a:lnL w="6350" cap="flat" cmpd="sng" algn="ctr">
-                      <a:solidFill>
-                        <a:srgbClr val="E4DADD"/>
-                      </a:solidFill>
-                      <a:prstDash val="solid"/>
-                      <a:round/>
-                      <a:headEnd type="none" w="med" len="med"/>
-                      <a:tailEnd type="none" w="med" len="med"/>
-                    </a:lnL>
-                    <a:lnR w="6350" cap="flat" cmpd="sng" algn="ctr">
-                      <a:solidFill>
-                        <a:srgbClr val="E4DADD"/>
-                      </a:solidFill>
-                      <a:prstDash val="solid"/>
-                      <a:round/>
-                      <a:headEnd type="none" w="med" len="med"/>
-                      <a:tailEnd type="none" w="med" len="med"/>
-                    </a:lnR>
-                    <a:lnT w="6350" cap="flat" cmpd="sng" algn="ctr">
-                      <a:solidFill>
-                        <a:srgbClr val="E4DADD"/>
-                      </a:solidFill>
-                      <a:prstDash val="solid"/>
-                      <a:round/>
-                      <a:headEnd type="none" w="med" len="med"/>
-                      <a:tailEnd type="none" w="med" len="med"/>
-                    </a:lnT>
-                    <a:lnB w="6350" cap="flat" cmpd="sng" algn="ctr">
-                      <a:solidFill>
-                        <a:srgbClr val="E4DADD"/>
-                      </a:solidFill>
-                      <a:prstDash val="solid"/>
-                      <a:round/>
-                      <a:headEnd type="none" w="med" len="med"/>
-                      <a:tailEnd type="none" w="med" len="med"/>
-                    </a:lnB>
-                    <a:solidFill>
-                      <a:srgbClr val="6D2E46"/>
-                    </a:solidFill>
-                  </a:tcPr>
-                </a:tc>
-              </a:tr>
-              <a:tr h="548640">
-                <a:tc>
-                  <a:txBody>
-                    <a:bodyPr/>
-                    <a:lstStyle/>
-                    <a:p>
-                      <a:pPr indent="0" marL="0">
-                        <a:buNone/>
-                      </a:pPr>
-                      <a:r>
-                        <a:rPr lang="en-US" sz="900" b="1" dirty="0">
-                          <a:solidFill>
-                            <a:srgbClr val="1F1A1C"/>
-                          </a:solidFill>
-                          <a:latin typeface="Calibri" pitchFamily="34" charset="0"/>
-                          <a:ea typeface="Calibri" pitchFamily="34" charset="-122"/>
-                          <a:cs typeface="Calibri" pitchFamily="34" charset="-120"/>
-                        </a:rPr>
-                        <a:t>決済時</a:t>
-                      </a:r>
-                      <a:endParaRPr lang="en-US" sz="900" dirty="0">
-                        <a:latin typeface="Calibri" charset="0"/>
-                        <a:ea typeface="Calibri" charset="0"/>
-                        <a:cs typeface="Calibri" charset="0"/>
-                      </a:endParaRPr>
-                    </a:p>
-                    <a:p>
-                      <a:pPr indent="0" marL="0">
-                        <a:buNone/>
-                      </a:pPr>
-                      <a:r>
-                        <a:rPr lang="en-US" sz="900" b="1" dirty="0">
-                          <a:solidFill>
-                            <a:srgbClr val="1F1A1C"/>
-                          </a:solidFill>
-                          <a:latin typeface="Calibri" pitchFamily="34" charset="0"/>
-                          <a:ea typeface="Calibri" pitchFamily="34" charset="-122"/>
-                          <a:cs typeface="Calibri" pitchFamily="34" charset="-120"/>
-                        </a:rPr>
-                        <a:t>（2026年12月）</a:t>
-                      </a:r>
-                      <a:endParaRPr lang="en-US" sz="900" dirty="0">
-                        <a:latin typeface="Calibri" charset="0"/>
-                        <a:ea typeface="Calibri" charset="0"/>
-                        <a:cs typeface="Calibri" charset="0"/>
-                      </a:endParaRPr>
-                    </a:p>
-                  </a:txBody>
-                  <a:tcPr marL="63500" marR="63500" marT="38100" marB="38100" anchor="ctr">
-                    <a:lnL w="6350" cap="flat" cmpd="sng" algn="ctr">
-                      <a:solidFill>
-                        <a:srgbClr val="E4DADD"/>
-                      </a:solidFill>
-                      <a:prstDash val="solid"/>
-                      <a:round/>
-                      <a:headEnd type="none" w="med" len="med"/>
-                      <a:tailEnd type="none" w="med" len="med"/>
-                    </a:lnL>
-                    <a:lnR w="6350" cap="flat" cmpd="sng" algn="ctr">
-                      <a:solidFill>
-                        <a:srgbClr val="E4DADD"/>
-                      </a:solidFill>
-                      <a:prstDash val="solid"/>
-                      <a:round/>
-                      <a:headEnd type="none" w="med" len="med"/>
-                      <a:tailEnd type="none" w="med" len="med"/>
-                    </a:lnR>
-                    <a:lnT w="6350" cap="flat" cmpd="sng" algn="ctr">
-                      <a:solidFill>
-                        <a:srgbClr val="E4DADD"/>
-                      </a:solidFill>
-                      <a:prstDash val="solid"/>
-                      <a:round/>
-                      <a:headEnd type="none" w="med" len="med"/>
-                      <a:tailEnd type="none" w="med" len="med"/>
-                    </a:lnT>
-                    <a:lnB w="6350" cap="flat" cmpd="sng" algn="ctr">
-                      <a:solidFill>
-                        <a:srgbClr val="E4DADD"/>
-                      </a:solidFill>
-                      <a:prstDash val="solid"/>
-                      <a:round/>
-                      <a:headEnd type="none" w="med" len="med"/>
-                      <a:tailEnd type="none" w="med" len="med"/>
-                    </a:lnB>
-                  </a:tcPr>
-                </a:tc>
-                <a:tc>
-                  <a:txBody>
-                    <a:bodyPr/>
-                    <a:lstStyle/>
-                    <a:p>
-                      <a:pPr indent="0" marL="0">
-                        <a:buNone/>
-                      </a:pPr>
-                      <a:r>
-                        <a:rPr lang="en-US" sz="900" dirty="0">
-                          <a:solidFill>
-                            <a:srgbClr val="1F1A1C"/>
-                          </a:solidFill>
-                          <a:latin typeface="Calibri" pitchFamily="34" charset="0"/>
-                          <a:ea typeface="Calibri" pitchFamily="34" charset="-122"/>
-                          <a:cs typeface="Calibri" pitchFamily="34" charset="-120"/>
-                        </a:rPr>
-                        <a:t>月額報酬60万円×在任20年×功績倍率3.0</a:t>
-                      </a:r>
-                      <a:endParaRPr lang="en-US" sz="900" dirty="0">
-                        <a:latin typeface="Calibri" charset="0"/>
-                        <a:ea typeface="Calibri" charset="0"/>
-                        <a:cs typeface="Calibri" charset="0"/>
-                      </a:endParaRPr>
-                    </a:p>
-                  </a:txBody>
-                  <a:tcPr marL="63500" marR="63500" marT="38100" marB="38100" anchor="ctr">
-                    <a:lnL w="6350" cap="flat" cmpd="sng" algn="ctr">
-                      <a:solidFill>
-                        <a:srgbClr val="E4DADD"/>
-                      </a:solidFill>
-                      <a:prstDash val="solid"/>
-                      <a:round/>
-                      <a:headEnd type="none" w="med" len="med"/>
-                      <a:tailEnd type="none" w="med" len="med"/>
-                    </a:lnL>
-                    <a:lnR w="6350" cap="flat" cmpd="sng" algn="ctr">
-                      <a:solidFill>
-                        <a:srgbClr val="E4DADD"/>
-                      </a:solidFill>
-                      <a:prstDash val="solid"/>
-                      <a:round/>
-                      <a:headEnd type="none" w="med" len="med"/>
-                      <a:tailEnd type="none" w="med" len="med"/>
-                    </a:lnR>
-                    <a:lnT w="6350" cap="flat" cmpd="sng" algn="ctr">
-                      <a:solidFill>
-                        <a:srgbClr val="E4DADD"/>
-                      </a:solidFill>
-                      <a:prstDash val="solid"/>
-                      <a:round/>
-                      <a:headEnd type="none" w="med" len="med"/>
-                      <a:tailEnd type="none" w="med" len="med"/>
-                    </a:lnT>
-                    <a:lnB w="6350" cap="flat" cmpd="sng" algn="ctr">
-                      <a:solidFill>
-                        <a:srgbClr val="E4DADD"/>
-                      </a:solidFill>
-                      <a:prstDash val="solid"/>
-                      <a:round/>
-                      <a:headEnd type="none" w="med" len="med"/>
-                      <a:tailEnd type="none" w="med" len="med"/>
-                    </a:lnB>
-                  </a:tcPr>
-                </a:tc>
-                <a:tc>
-                  <a:txBody>
-                    <a:bodyPr/>
-                    <a:lstStyle/>
-                    <a:p>
-                      <a:pPr algn="r" indent="0" marL="0">
-                        <a:buNone/>
-                      </a:pPr>
-                      <a:r>
-                        <a:rPr lang="en-US" sz="950" dirty="0">
-                          <a:solidFill>
-                            <a:srgbClr val="1F1A1C"/>
-                          </a:solidFill>
-                          <a:latin typeface="Calibri" pitchFamily="34" charset="0"/>
-                          <a:ea typeface="Calibri" pitchFamily="34" charset="-122"/>
-                          <a:cs typeface="Calibri" pitchFamily="34" charset="-120"/>
-                        </a:rPr>
-                        <a:t>約0.36億円</a:t>
-                      </a:r>
-                      <a:endParaRPr lang="en-US" sz="950" dirty="0">
-                        <a:latin typeface="Calibri" charset="0"/>
-                        <a:ea typeface="Calibri" charset="0"/>
-                        <a:cs typeface="Calibri" charset="0"/>
-                      </a:endParaRPr>
-                    </a:p>
-                  </a:txBody>
-                  <a:tcPr marL="63500" marR="63500" marT="38100" marB="38100" anchor="ctr">
-                    <a:lnL w="6350" cap="flat" cmpd="sng" algn="ctr">
-                      <a:solidFill>
-                        <a:srgbClr val="E4DADD"/>
-                      </a:solidFill>
-                      <a:prstDash val="solid"/>
-                      <a:round/>
-                      <a:headEnd type="none" w="med" len="med"/>
-                      <a:tailEnd type="none" w="med" len="med"/>
-                    </a:lnL>
-                    <a:lnR w="6350" cap="flat" cmpd="sng" algn="ctr">
-                      <a:solidFill>
-                        <a:srgbClr val="E4DADD"/>
-                      </a:solidFill>
-                      <a:prstDash val="solid"/>
-                      <a:round/>
-                      <a:headEnd type="none" w="med" len="med"/>
-                      <a:tailEnd type="none" w="med" len="med"/>
-                    </a:lnR>
-                    <a:lnT w="6350" cap="flat" cmpd="sng" algn="ctr">
-                      <a:solidFill>
-                        <a:srgbClr val="E4DADD"/>
-                      </a:solidFill>
-                      <a:prstDash val="solid"/>
-                      <a:round/>
-                      <a:headEnd type="none" w="med" len="med"/>
-                      <a:tailEnd type="none" w="med" len="med"/>
-                    </a:lnT>
-                    <a:lnB w="6350" cap="flat" cmpd="sng" algn="ctr">
-                      <a:solidFill>
-                        <a:srgbClr val="E4DADD"/>
-                      </a:solidFill>
-                      <a:prstDash val="solid"/>
-                      <a:round/>
-                      <a:headEnd type="none" w="med" len="med"/>
-                      <a:tailEnd type="none" w="med" len="med"/>
-                    </a:lnB>
-                  </a:tcPr>
-                </a:tc>
-                <a:tc>
-                  <a:txBody>
-                    <a:bodyPr/>
-                    <a:lstStyle/>
-                    <a:p>
-                      <a:pPr algn="r" indent="0" marL="0">
-                        <a:buNone/>
-                      </a:pPr>
-                      <a:r>
-                        <a:rPr lang="en-US" sz="950" dirty="0">
-                          <a:solidFill>
-                            <a:srgbClr val="1F1A1C"/>
-                          </a:solidFill>
-                          <a:latin typeface="Calibri" pitchFamily="34" charset="0"/>
-                          <a:ea typeface="Calibri" pitchFamily="34" charset="-122"/>
-                          <a:cs typeface="Calibri" pitchFamily="34" charset="-120"/>
-                        </a:rPr>
-                        <a:t>約0.12億円</a:t>
-                      </a:r>
-                      <a:endParaRPr lang="en-US" sz="950" dirty="0">
-                        <a:latin typeface="Calibri" charset="0"/>
-                        <a:ea typeface="Calibri" charset="0"/>
-                        <a:cs typeface="Calibri" charset="0"/>
-                      </a:endParaRPr>
-                    </a:p>
-                  </a:txBody>
-                  <a:tcPr marL="63500" marR="63500" marT="38100" marB="38100" anchor="ctr">
-                    <a:lnL w="6350" cap="flat" cmpd="sng" algn="ctr">
-                      <a:solidFill>
-                        <a:srgbClr val="E4DADD"/>
-                      </a:solidFill>
-                      <a:prstDash val="solid"/>
-                      <a:round/>
-                      <a:headEnd type="none" w="med" len="med"/>
-                      <a:tailEnd type="none" w="med" len="med"/>
-                    </a:lnL>
-                    <a:lnR w="6350" cap="flat" cmpd="sng" algn="ctr">
-                      <a:solidFill>
-                        <a:srgbClr val="E4DADD"/>
-                      </a:solidFill>
-                      <a:prstDash val="solid"/>
-                      <a:round/>
-                      <a:headEnd type="none" w="med" len="med"/>
-                      <a:tailEnd type="none" w="med" len="med"/>
-                    </a:lnR>
-                    <a:lnT w="6350" cap="flat" cmpd="sng" algn="ctr">
-                      <a:solidFill>
-                        <a:srgbClr val="E4DADD"/>
-                      </a:solidFill>
-                      <a:prstDash val="solid"/>
-                      <a:round/>
-                      <a:headEnd type="none" w="med" len="med"/>
-                      <a:tailEnd type="none" w="med" len="med"/>
-                    </a:lnT>
-                    <a:lnB w="6350" cap="flat" cmpd="sng" algn="ctr">
-                      <a:solidFill>
-                        <a:srgbClr val="E4DADD"/>
-                      </a:solidFill>
-                      <a:prstDash val="solid"/>
-                      <a:round/>
-                      <a:headEnd type="none" w="med" len="med"/>
-                      <a:tailEnd type="none" w="med" len="med"/>
-                    </a:lnB>
-                  </a:tcPr>
-                </a:tc>
-                <a:tc>
-                  <a:txBody>
-                    <a:bodyPr/>
-                    <a:lstStyle/>
-                    <a:p>
-                      <a:pPr algn="ctr" indent="0" marL="0">
-                        <a:buNone/>
-                      </a:pPr>
-                      <a:r>
-                        <a:rPr lang="en-US" sz="950" b="1" dirty="0">
-                          <a:solidFill>
-                            <a:srgbClr val="2E6F4E"/>
-                          </a:solidFill>
-                          <a:latin typeface="Calibri" pitchFamily="34" charset="0"/>
-                          <a:ea typeface="Calibri" pitchFamily="34" charset="-122"/>
-                          <a:cs typeface="Calibri" pitchFamily="34" charset="-120"/>
-                        </a:rPr>
-                        <a:t>約280万円</a:t>
-                      </a:r>
-                      <a:endParaRPr lang="en-US" sz="950" dirty="0">
-                        <a:latin typeface="Calibri" charset="0"/>
-                        <a:ea typeface="Calibri" charset="0"/>
-                        <a:cs typeface="Calibri" charset="0"/>
-                      </a:endParaRPr>
-                    </a:p>
-                    <a:p>
-                      <a:pPr algn="ctr" indent="0" marL="0">
-                        <a:buNone/>
-                      </a:pPr>
-                      <a:r>
-                        <a:rPr lang="en-US" sz="950" b="1" dirty="0">
-                          <a:solidFill>
-                            <a:srgbClr val="2E6F4E"/>
-                          </a:solidFill>
-                          <a:latin typeface="Calibri" pitchFamily="34" charset="0"/>
-                          <a:ea typeface="Calibri" pitchFamily="34" charset="-122"/>
-                          <a:cs typeface="Calibri" pitchFamily="34" charset="-120"/>
-                        </a:rPr>
-                        <a:t>軽くなる</a:t>
-                      </a:r>
-                      <a:endParaRPr lang="en-US" sz="950" dirty="0">
-                        <a:latin typeface="Calibri" charset="0"/>
-                        <a:ea typeface="Calibri" charset="0"/>
-                        <a:cs typeface="Calibri" charset="0"/>
-                      </a:endParaRPr>
-                    </a:p>
-                  </a:txBody>
-                  <a:tcPr marL="63500" marR="63500" marT="38100" marB="38100" anchor="ctr">
-                    <a:lnL w="6350" cap="flat" cmpd="sng" algn="ctr">
-                      <a:solidFill>
-                        <a:srgbClr val="E4DADD"/>
-                      </a:solidFill>
-                      <a:prstDash val="solid"/>
-                      <a:round/>
-                      <a:headEnd type="none" w="med" len="med"/>
-                      <a:tailEnd type="none" w="med" len="med"/>
-                    </a:lnL>
-                    <a:lnR w="6350" cap="flat" cmpd="sng" algn="ctr">
-                      <a:solidFill>
-                        <a:srgbClr val="E4DADD"/>
-                      </a:solidFill>
-                      <a:prstDash val="solid"/>
-                      <a:round/>
-                      <a:headEnd type="none" w="med" len="med"/>
-                      <a:tailEnd type="none" w="med" len="med"/>
-                    </a:lnR>
-                    <a:lnT w="6350" cap="flat" cmpd="sng" algn="ctr">
-                      <a:solidFill>
-                        <a:srgbClr val="E4DADD"/>
-                      </a:solidFill>
-                      <a:prstDash val="solid"/>
-                      <a:round/>
-                      <a:headEnd type="none" w="med" len="med"/>
-                      <a:tailEnd type="none" w="med" len="med"/>
-                    </a:lnT>
-                    <a:lnB w="6350" cap="flat" cmpd="sng" algn="ctr">
-                      <a:solidFill>
-                        <a:srgbClr val="E4DADD"/>
-                      </a:solidFill>
-                      <a:prstDash val="solid"/>
-                      <a:round/>
-                      <a:headEnd type="none" w="med" len="med"/>
-                      <a:tailEnd type="none" w="med" len="med"/>
-                    </a:lnB>
-                  </a:tcPr>
-                </a:tc>
-              </a:tr>
-              <a:tr h="548640">
-                <a:tc>
-                  <a:txBody>
-                    <a:bodyPr/>
-                    <a:lstStyle/>
-                    <a:p>
-                      <a:pPr indent="0" marL="0">
-                        <a:buNone/>
-                      </a:pPr>
-                      <a:r>
-                        <a:rPr lang="en-US" sz="900" b="1" dirty="0">
-                          <a:solidFill>
-                            <a:srgbClr val="1F1A1C"/>
-                          </a:solidFill>
-                          <a:latin typeface="Calibri" pitchFamily="34" charset="0"/>
-                          <a:ea typeface="Calibri" pitchFamily="34" charset="-122"/>
-                          <a:cs typeface="Calibri" pitchFamily="34" charset="-120"/>
-                        </a:rPr>
-                        <a:t>最終ご退任時</a:t>
-                      </a:r>
-                      <a:endParaRPr lang="en-US" sz="900" dirty="0">
-                        <a:latin typeface="Calibri" charset="0"/>
-                        <a:ea typeface="Calibri" charset="0"/>
-                        <a:cs typeface="Calibri" charset="0"/>
-                      </a:endParaRPr>
-                    </a:p>
-                    <a:p>
-                      <a:pPr indent="0" marL="0">
-                        <a:buNone/>
-                      </a:pPr>
-                      <a:r>
-                        <a:rPr lang="en-US" sz="900" b="1" dirty="0">
-                          <a:solidFill>
-                            <a:srgbClr val="1F1A1C"/>
-                          </a:solidFill>
-                          <a:latin typeface="Calibri" pitchFamily="34" charset="0"/>
-                          <a:ea typeface="Calibri" pitchFamily="34" charset="-122"/>
-                          <a:cs typeface="Calibri" pitchFamily="34" charset="-120"/>
-                        </a:rPr>
-                        <a:t>（4〜5年目）</a:t>
-                      </a:r>
-                      <a:endParaRPr lang="en-US" sz="900" dirty="0">
-                        <a:latin typeface="Calibri" charset="0"/>
-                        <a:ea typeface="Calibri" charset="0"/>
-                        <a:cs typeface="Calibri" charset="0"/>
-                      </a:endParaRPr>
-                    </a:p>
-                  </a:txBody>
-                  <a:tcPr marL="63500" marR="63500" marT="38100" marB="38100" anchor="ctr">
-                    <a:lnL w="6350" cap="flat" cmpd="sng" algn="ctr">
-                      <a:solidFill>
-                        <a:srgbClr val="E4DADD"/>
-                      </a:solidFill>
-                      <a:prstDash val="solid"/>
-                      <a:round/>
-                      <a:headEnd type="none" w="med" len="med"/>
-                      <a:tailEnd type="none" w="med" len="med"/>
-                    </a:lnL>
-                    <a:lnR w="6350" cap="flat" cmpd="sng" algn="ctr">
-                      <a:solidFill>
-                        <a:srgbClr val="E4DADD"/>
-                      </a:solidFill>
-                      <a:prstDash val="solid"/>
-                      <a:round/>
-                      <a:headEnd type="none" w="med" len="med"/>
-                      <a:tailEnd type="none" w="med" len="med"/>
-                    </a:lnR>
-                    <a:lnT w="6350" cap="flat" cmpd="sng" algn="ctr">
-                      <a:solidFill>
-                        <a:srgbClr val="E4DADD"/>
-                      </a:solidFill>
-                      <a:prstDash val="solid"/>
-                      <a:round/>
-                      <a:headEnd type="none" w="med" len="med"/>
-                      <a:tailEnd type="none" w="med" len="med"/>
-                    </a:lnT>
-                    <a:lnB w="6350" cap="flat" cmpd="sng" algn="ctr">
-                      <a:solidFill>
-                        <a:srgbClr val="E4DADD"/>
-                      </a:solidFill>
-                      <a:prstDash val="solid"/>
-                      <a:round/>
-                      <a:headEnd type="none" w="med" len="med"/>
-                      <a:tailEnd type="none" w="med" len="med"/>
-                    </a:lnB>
-                    <a:solidFill>
-                      <a:srgbClr val="EAF2ED"/>
-                    </a:solidFill>
-                  </a:tcPr>
-                </a:tc>
-                <a:tc>
-                  <a:txBody>
-                    <a:bodyPr/>
-                    <a:lstStyle/>
-                    <a:p>
-                      <a:pPr indent="0" marL="0">
-                        <a:buNone/>
-                      </a:pPr>
-                      <a:r>
-                        <a:rPr lang="en-US" sz="900" dirty="0">
-                          <a:solidFill>
-                            <a:srgbClr val="1F1A1C"/>
-                          </a:solidFill>
-                          <a:latin typeface="Calibri" pitchFamily="34" charset="0"/>
-                          <a:ea typeface="Calibri" pitchFamily="34" charset="-122"/>
-                          <a:cs typeface="Calibri" pitchFamily="34" charset="-120"/>
-                        </a:rPr>
-                        <a:t>月額報酬約167万円×在任24〜25年×功績倍率2.0〜3.0</a:t>
-                      </a:r>
-                      <a:endParaRPr lang="en-US" sz="900" dirty="0">
-                        <a:latin typeface="Calibri" charset="0"/>
-                        <a:ea typeface="Calibri" charset="0"/>
-                        <a:cs typeface="Calibri" charset="0"/>
-                      </a:endParaRPr>
-                    </a:p>
-                  </a:txBody>
-                  <a:tcPr marL="63500" marR="63500" marT="38100" marB="38100" anchor="ctr">
-                    <a:lnL w="6350" cap="flat" cmpd="sng" algn="ctr">
-                      <a:solidFill>
-                        <a:srgbClr val="E4DADD"/>
-                      </a:solidFill>
-                      <a:prstDash val="solid"/>
-                      <a:round/>
-                      <a:headEnd type="none" w="med" len="med"/>
-                      <a:tailEnd type="none" w="med" len="med"/>
-                    </a:lnL>
-                    <a:lnR w="6350" cap="flat" cmpd="sng" algn="ctr">
-                      <a:solidFill>
-                        <a:srgbClr val="E4DADD"/>
-                      </a:solidFill>
-                      <a:prstDash val="solid"/>
-                      <a:round/>
-                      <a:headEnd type="none" w="med" len="med"/>
-                      <a:tailEnd type="none" w="med" len="med"/>
-                    </a:lnR>
-                    <a:lnT w="6350" cap="flat" cmpd="sng" algn="ctr">
-                      <a:solidFill>
-                        <a:srgbClr val="E4DADD"/>
-                      </a:solidFill>
-                      <a:prstDash val="solid"/>
-                      <a:round/>
-                      <a:headEnd type="none" w="med" len="med"/>
-                      <a:tailEnd type="none" w="med" len="med"/>
-                    </a:lnT>
-                    <a:lnB w="6350" cap="flat" cmpd="sng" algn="ctr">
-                      <a:solidFill>
-                        <a:srgbClr val="E4DADD"/>
-                      </a:solidFill>
-                      <a:prstDash val="solid"/>
-                      <a:round/>
-                      <a:headEnd type="none" w="med" len="med"/>
-                      <a:tailEnd type="none" w="med" len="med"/>
-                    </a:lnB>
-                    <a:solidFill>
-                      <a:srgbClr val="EAF2ED"/>
-                    </a:solidFill>
-                  </a:tcPr>
-                </a:tc>
-                <a:tc>
-                  <a:txBody>
-                    <a:bodyPr/>
-                    <a:lstStyle/>
-                    <a:p>
-                      <a:pPr algn="r" indent="0" marL="0">
-                        <a:buNone/>
-                      </a:pPr>
-                      <a:r>
-                        <a:rPr lang="en-US" sz="950" b="1" dirty="0">
-                          <a:solidFill>
-                            <a:srgbClr val="1F1A1C"/>
-                          </a:solidFill>
-                          <a:latin typeface="Calibri" pitchFamily="34" charset="0"/>
-                          <a:ea typeface="Calibri" pitchFamily="34" charset="-122"/>
-                          <a:cs typeface="Calibri" pitchFamily="34" charset="-120"/>
-                        </a:rPr>
-                        <a:t>約0.8〜</a:t>
-                      </a:r>
-                      <a:endParaRPr lang="en-US" sz="950" dirty="0">
-                        <a:latin typeface="Calibri" charset="0"/>
-                        <a:ea typeface="Calibri" charset="0"/>
-                        <a:cs typeface="Calibri" charset="0"/>
-                      </a:endParaRPr>
-                    </a:p>
-                    <a:p>
-                      <a:pPr algn="r" indent="0" marL="0">
-                        <a:buNone/>
-                      </a:pPr>
-                      <a:r>
-                        <a:rPr lang="en-US" sz="950" b="1" dirty="0">
-                          <a:solidFill>
-                            <a:srgbClr val="1F1A1C"/>
-                          </a:solidFill>
-                          <a:latin typeface="Calibri" pitchFamily="34" charset="0"/>
-                          <a:ea typeface="Calibri" pitchFamily="34" charset="-122"/>
-                          <a:cs typeface="Calibri" pitchFamily="34" charset="-120"/>
-                        </a:rPr>
-                        <a:t>1.25億円</a:t>
-                      </a:r>
-                      <a:endParaRPr lang="en-US" sz="950" dirty="0">
-                        <a:latin typeface="Calibri" charset="0"/>
-                        <a:ea typeface="Calibri" charset="0"/>
-                        <a:cs typeface="Calibri" charset="0"/>
-                      </a:endParaRPr>
-                    </a:p>
-                  </a:txBody>
-                  <a:tcPr marL="63500" marR="63500" marT="38100" marB="38100" anchor="ctr">
-                    <a:lnL w="6350" cap="flat" cmpd="sng" algn="ctr">
-                      <a:solidFill>
-                        <a:srgbClr val="E4DADD"/>
-                      </a:solidFill>
-                      <a:prstDash val="solid"/>
-                      <a:round/>
-                      <a:headEnd type="none" w="med" len="med"/>
-                      <a:tailEnd type="none" w="med" len="med"/>
-                    </a:lnL>
-                    <a:lnR w="6350" cap="flat" cmpd="sng" algn="ctr">
-                      <a:solidFill>
-                        <a:srgbClr val="E4DADD"/>
-                      </a:solidFill>
-                      <a:prstDash val="solid"/>
-                      <a:round/>
-                      <a:headEnd type="none" w="med" len="med"/>
-                      <a:tailEnd type="none" w="med" len="med"/>
-                    </a:lnR>
-                    <a:lnT w="6350" cap="flat" cmpd="sng" algn="ctr">
-                      <a:solidFill>
-                        <a:srgbClr val="E4DADD"/>
-                      </a:solidFill>
-                      <a:prstDash val="solid"/>
-                      <a:round/>
-                      <a:headEnd type="none" w="med" len="med"/>
-                      <a:tailEnd type="none" w="med" len="med"/>
-                    </a:lnT>
-                    <a:lnB w="6350" cap="flat" cmpd="sng" algn="ctr">
-                      <a:solidFill>
-                        <a:srgbClr val="E4DADD"/>
-                      </a:solidFill>
-                      <a:prstDash val="solid"/>
-                      <a:round/>
-                      <a:headEnd type="none" w="med" len="med"/>
-                      <a:tailEnd type="none" w="med" len="med"/>
-                    </a:lnB>
-                    <a:solidFill>
-                      <a:srgbClr val="EAF2ED"/>
-                    </a:solidFill>
-                  </a:tcPr>
-                </a:tc>
-                <a:tc>
-                  <a:txBody>
-                    <a:bodyPr/>
-                    <a:lstStyle/>
-                    <a:p>
-                      <a:pPr algn="r" indent="0" marL="0">
-                        <a:buNone/>
-                      </a:pPr>
-                      <a:r>
-                        <a:rPr lang="en-US" sz="950" b="1" dirty="0">
-                          <a:solidFill>
-                            <a:srgbClr val="2E6F4E"/>
-                          </a:solidFill>
-                          <a:latin typeface="Calibri" pitchFamily="34" charset="0"/>
-                          <a:ea typeface="Calibri" pitchFamily="34" charset="-122"/>
-                          <a:cs typeface="Calibri" pitchFamily="34" charset="-120"/>
-                        </a:rPr>
-                        <a:t>約0.28〜</a:t>
-                      </a:r>
-                      <a:endParaRPr lang="en-US" sz="950" dirty="0">
-                        <a:latin typeface="Calibri" charset="0"/>
-                        <a:ea typeface="Calibri" charset="0"/>
-                        <a:cs typeface="Calibri" charset="0"/>
-                      </a:endParaRPr>
-                    </a:p>
-                    <a:p>
-                      <a:pPr algn="r" indent="0" marL="0">
-                        <a:buNone/>
-                      </a:pPr>
-                      <a:r>
-                        <a:rPr lang="en-US" sz="950" b="1" dirty="0">
-                          <a:solidFill>
-                            <a:srgbClr val="2E6F4E"/>
-                          </a:solidFill>
-                          <a:latin typeface="Calibri" pitchFamily="34" charset="0"/>
-                          <a:ea typeface="Calibri" pitchFamily="34" charset="-122"/>
-                          <a:cs typeface="Calibri" pitchFamily="34" charset="-120"/>
-                        </a:rPr>
-                        <a:t>0.43億円</a:t>
-                      </a:r>
-                      <a:endParaRPr lang="en-US" sz="950" dirty="0">
-                        <a:latin typeface="Calibri" charset="0"/>
-                        <a:ea typeface="Calibri" charset="0"/>
-                        <a:cs typeface="Calibri" charset="0"/>
-                      </a:endParaRPr>
-                    </a:p>
-                  </a:txBody>
-                  <a:tcPr marL="63500" marR="63500" marT="38100" marB="38100" anchor="ctr">
-                    <a:lnL w="6350" cap="flat" cmpd="sng" algn="ctr">
-                      <a:solidFill>
-                        <a:srgbClr val="E4DADD"/>
-                      </a:solidFill>
-                      <a:prstDash val="solid"/>
-                      <a:round/>
-                      <a:headEnd type="none" w="med" len="med"/>
-                      <a:tailEnd type="none" w="med" len="med"/>
-                    </a:lnL>
-                    <a:lnR w="6350" cap="flat" cmpd="sng" algn="ctr">
-                      <a:solidFill>
-                        <a:srgbClr val="E4DADD"/>
-                      </a:solidFill>
-                      <a:prstDash val="solid"/>
-                      <a:round/>
-                      <a:headEnd type="none" w="med" len="med"/>
-                      <a:tailEnd type="none" w="med" len="med"/>
-                    </a:lnR>
-                    <a:lnT w="6350" cap="flat" cmpd="sng" algn="ctr">
-                      <a:solidFill>
-                        <a:srgbClr val="E4DADD"/>
-                      </a:solidFill>
-                      <a:prstDash val="solid"/>
-                      <a:round/>
-                      <a:headEnd type="none" w="med" len="med"/>
-                      <a:tailEnd type="none" w="med" len="med"/>
-                    </a:lnT>
-                    <a:lnB w="6350" cap="flat" cmpd="sng" algn="ctr">
-                      <a:solidFill>
-                        <a:srgbClr val="E4DADD"/>
-                      </a:solidFill>
-                      <a:prstDash val="solid"/>
-                      <a:round/>
-                      <a:headEnd type="none" w="med" len="med"/>
-                      <a:tailEnd type="none" w="med" len="med"/>
-                    </a:lnB>
-                    <a:solidFill>
-                      <a:srgbClr val="EAF2ED"/>
-                    </a:solidFill>
-                  </a:tcPr>
-                </a:tc>
-                <a:tc>
-                  <a:txBody>
-                    <a:bodyPr/>
-                    <a:lstStyle/>
-                    <a:p>
-                      <a:pPr algn="ctr" indent="0" marL="0">
-                        <a:buNone/>
-                      </a:pPr>
-                      <a:r>
-                        <a:rPr lang="en-US" sz="950" dirty="0">
-                          <a:solidFill>
-                            <a:srgbClr val="1F1A1C"/>
-                          </a:solidFill>
-                          <a:latin typeface="Calibri" pitchFamily="34" charset="0"/>
-                          <a:ea typeface="Calibri" pitchFamily="34" charset="-122"/>
-                          <a:cs typeface="Calibri" pitchFamily="34" charset="-120"/>
-                        </a:rPr>
-                        <a:t>ほぼ同水準</a:t>
-                      </a:r>
-                      <a:endParaRPr lang="en-US" sz="950" dirty="0">
-                        <a:latin typeface="Calibri" charset="0"/>
-                        <a:ea typeface="Calibri" charset="0"/>
-                        <a:cs typeface="Calibri" charset="0"/>
-                      </a:endParaRPr>
-                    </a:p>
-                    <a:p>
-                      <a:pPr algn="ctr" indent="0" marL="0">
-                        <a:buNone/>
-                      </a:pPr>
-                      <a:r>
-                        <a:rPr lang="en-US" sz="950" dirty="0">
-                          <a:solidFill>
-                            <a:srgbClr val="1F1A1C"/>
-                          </a:solidFill>
-                          <a:latin typeface="Calibri" pitchFamily="34" charset="0"/>
-                          <a:ea typeface="Calibri" pitchFamily="34" charset="-122"/>
-                          <a:cs typeface="Calibri" pitchFamily="34" charset="-120"/>
-                        </a:rPr>
-                        <a:t>（±150万円程度）</a:t>
-                      </a:r>
-                      <a:endParaRPr lang="en-US" sz="950" dirty="0">
-                        <a:latin typeface="Calibri" charset="0"/>
-                        <a:ea typeface="Calibri" charset="0"/>
-                        <a:cs typeface="Calibri" charset="0"/>
-                      </a:endParaRPr>
-                    </a:p>
-                  </a:txBody>
-                  <a:tcPr marL="63500" marR="63500" marT="38100" marB="38100" anchor="ctr">
-                    <a:lnL w="6350" cap="flat" cmpd="sng" algn="ctr">
-                      <a:solidFill>
-                        <a:srgbClr val="E4DADD"/>
-                      </a:solidFill>
-                      <a:prstDash val="solid"/>
-                      <a:round/>
-                      <a:headEnd type="none" w="med" len="med"/>
-                      <a:tailEnd type="none" w="med" len="med"/>
-                    </a:lnL>
-                    <a:lnR w="6350" cap="flat" cmpd="sng" algn="ctr">
-                      <a:solidFill>
-                        <a:srgbClr val="E4DADD"/>
-                      </a:solidFill>
-                      <a:prstDash val="solid"/>
-                      <a:round/>
-                      <a:headEnd type="none" w="med" len="med"/>
-                      <a:tailEnd type="none" w="med" len="med"/>
-                    </a:lnR>
-                    <a:lnT w="6350" cap="flat" cmpd="sng" algn="ctr">
-                      <a:solidFill>
-                        <a:srgbClr val="E4DADD"/>
-                      </a:solidFill>
-                      <a:prstDash val="solid"/>
-                      <a:round/>
-                      <a:headEnd type="none" w="med" len="med"/>
-                      <a:tailEnd type="none" w="med" len="med"/>
-                    </a:lnT>
-                    <a:lnB w="6350" cap="flat" cmpd="sng" algn="ctr">
-                      <a:solidFill>
-                        <a:srgbClr val="E4DADD"/>
-                      </a:solidFill>
-                      <a:prstDash val="solid"/>
-                      <a:round/>
-                      <a:headEnd type="none" w="med" len="med"/>
-                      <a:tailEnd type="none" w="med" len="med"/>
-                    </a:lnB>
-                    <a:solidFill>
-                      <a:srgbClr val="EAF2ED"/>
-                    </a:solidFill>
-                  </a:tcPr>
-                </a:tc>
-              </a:tr>
-            </a:tbl>
-          </a:graphicData>
-        </a:graphic>
-      </p:graphicFrame>
-      <p:sp>
-        <p:nvSpPr>
-          <p:cNvPr id="22" name="Text 19"/>
-          <p:cNvSpPr txBox="1"/>
-          <p:nvPr/>
-        </p:nvSpPr>
-        <p:spPr>
-          <a:xfrm>
-            <a:off x="566928" y="4343400"/>
-            <a:ext cx="6446520" cy="685800"/>
-          </a:xfrm>
-          <a:prstGeom prst="rect">
-            <a:avLst/>
-          </a:prstGeom>
-          <a:noFill/>
-          <a:ln/>
-        </p:spPr>
-        <p:txBody>
-          <a:bodyPr wrap="square" lIns="0" tIns="0" rIns="0" bIns="0" rtlCol="0" anchor="ctr"/>
-          <a:lstStyle/>
-          <a:p>
-            <a:pPr indent="0" marL="0">
-              <a:lnSpc>
-                <a:spcPts val="1150"/>
-              </a:lnSpc>
-              <a:buNone/>
-            </a:pPr>
-            <a:r>
-              <a:rPr lang="en-US" sz="850" dirty="0">
-                <a:solidFill>
-                  <a:srgbClr val="6E6368"/>
-                </a:solidFill>
-                <a:latin typeface="Calibri" pitchFamily="34" charset="0"/>
-                <a:ea typeface="Calibri" pitchFamily="34" charset="-122"/>
-                <a:cs typeface="Calibri" pitchFamily="34" charset="-120"/>
-              </a:rPr>
-              <a:t>※ 最終ご退任時の月額報酬は、決済後の固定報酬（年2,000万円）を前提としています。最終ご退任時に支給する場合は、ご退任まで取締役を継続していただき、決済時には退職金を支給しないことが前提となります（決済時に支給すると在任期間が区切られるため）。財源は、前払い分またはアーンアウトの一部を振り替える形とし、総額は変えません。</a:t>
-            </a:r>
-            <a:endParaRPr lang="en-US" sz="850" dirty="0"/>
-          </a:p>
-        </p:txBody>
-      </p:sp>
-      <p:sp>
-        <p:nvSpPr>
-          <p:cNvPr id="23" name="Text 20"/>
-          <p:cNvSpPr txBox="1"/>
-          <p:nvPr/>
-        </p:nvSpPr>
-        <p:spPr>
-          <a:xfrm>
-            <a:off x="7287768" y="2432304"/>
-            <a:ext cx="4334256" cy="256032"/>
-          </a:xfrm>
-          <a:prstGeom prst="rect">
-            <a:avLst/>
-          </a:prstGeom>
-          <a:noFill/>
-          <a:ln/>
-        </p:spPr>
-        <p:txBody>
-          <a:bodyPr wrap="square" lIns="0" tIns="0" rIns="0" bIns="0" rtlCol="0" anchor="ctr"/>
-          <a:lstStyle/>
-          <a:p>
-            <a:pPr indent="0" marL="0">
-              <a:buNone/>
-            </a:pPr>
-            <a:r>
-              <a:rPr lang="en-US" sz="1150" b="1" dirty="0">
-                <a:solidFill>
-                  <a:srgbClr val="B58B2A"/>
-                </a:solidFill>
-                <a:latin typeface="Calibri" pitchFamily="34" charset="0"/>
-                <a:ea typeface="Calibri" pitchFamily="34" charset="-122"/>
-                <a:cs typeface="Calibri" pitchFamily="34" charset="-120"/>
-              </a:rPr>
-              <a:t>ご参考：アーンアウト1回4億円の払い方</a:t>
-            </a:r>
-            <a:endParaRPr lang="en-US" sz="1150" dirty="0"/>
-          </a:p>
-        </p:txBody>
-      </p:sp>
-      <p:graphicFrame>
-        <p:nvGraphicFramePr>
-          <p:cNvPr id="3" name="Table 1"/>
-          <p:cNvGraphicFramePr>
-            <a:graphicFrameLocks noGrp="1"/>
-          </p:cNvGraphicFramePr>
-          <p:nvPr>
-            <p:extLst>
-              <p:ext uri="{D42A27DB-BD31-4B8C-83A1-F6EECF244321}">
-                <p14:modId xmlns:p14="http://schemas.microsoft.com/office/powerpoint/2010/main" val="1579011935"/>
-              </p:ext>
-            </p:extLst>
-          </p:nvPr>
-        </p:nvGraphicFramePr>
-        <p:xfrm>
-          <a:off x="7287768" y="2724912"/>
-          <a:ext cx="4334256" cy="914400"/>
-        </p:xfrm>
-        <a:graphic>
-          <a:graphicData uri="http://schemas.openxmlformats.org/drawingml/2006/table">
-            <a:tbl>
-              <a:tblPr/>
-              <a:tblGrid>
-                <a:gridCol w="1600200"/>
-                <a:gridCol w="1463040"/>
-                <a:gridCol w="1271016"/>
-              </a:tblGrid>
-              <a:tr h="365760">
+              <a:tr h="384048">
                 <a:tc>
                   <a:txBody>
                     <a:bodyPr/>
@@ -2864,7 +1593,7 @@
                       </a:endParaRPr>
                     </a:p>
                   </a:txBody>
-                  <a:tcPr marL="63500" marR="63500" marT="38100" marB="38100" anchor="ctr">
+                  <a:tcPr marL="76200" marR="76200" marT="38100" marB="38100" anchor="ctr">
                     <a:lnL w="6350" cap="flat" cmpd="sng" algn="ctr">
                       <a:solidFill>
                         <a:srgbClr val="E4DADD"/>
@@ -2923,7 +1652,7 @@
                           <a:ea typeface="Calibri" pitchFamily="34" charset="-122"/>
                           <a:cs typeface="Calibri" pitchFamily="34" charset="-120"/>
                         </a:rPr>
-                        <a:t>岸田様の手取り</a:t>
+                        <a:t>岸田様の税負担</a:t>
                       </a:r>
                       <a:endParaRPr lang="en-US" sz="950" dirty="0">
                         <a:latin typeface="Calibri" charset="0"/>
@@ -2932,7 +1661,7 @@
                       </a:endParaRPr>
                     </a:p>
                   </a:txBody>
-                  <a:tcPr marL="63500" marR="63500" marT="38100" marB="38100" anchor="ctr">
+                  <a:tcPr marL="76200" marR="76200" marT="38100" marB="38100" anchor="ctr">
                     <a:lnL w="6350" cap="flat" cmpd="sng" algn="ctr">
                       <a:solidFill>
                         <a:srgbClr val="E4DADD"/>
@@ -2991,7 +1720,7 @@
                           <a:ea typeface="Calibri" pitchFamily="34" charset="-122"/>
                           <a:cs typeface="Calibri" pitchFamily="34" charset="-120"/>
                         </a:rPr>
-                        <a:t>会社の節税</a:t>
+                        <a:t>会社の税負担軽減</a:t>
                       </a:r>
                       <a:endParaRPr lang="en-US" sz="950" dirty="0">
                         <a:latin typeface="Calibri" charset="0"/>
@@ -3000,7 +1729,75 @@
                       </a:endParaRPr>
                     </a:p>
                   </a:txBody>
-                  <a:tcPr marL="63500" marR="63500" marT="38100" marB="38100" anchor="ctr">
+                  <a:tcPr marL="76200" marR="76200" marT="38100" marB="38100" anchor="ctr">
+                    <a:lnL w="6350" cap="flat" cmpd="sng" algn="ctr">
+                      <a:solidFill>
+                        <a:srgbClr val="E4DADD"/>
+                      </a:solidFill>
+                      <a:prstDash val="solid"/>
+                      <a:round/>
+                      <a:headEnd type="none" w="med" len="med"/>
+                      <a:tailEnd type="none" w="med" len="med"/>
+                    </a:lnL>
+                    <a:lnR w="6350" cap="flat" cmpd="sng" algn="ctr">
+                      <a:solidFill>
+                        <a:srgbClr val="E4DADD"/>
+                      </a:solidFill>
+                      <a:prstDash val="solid"/>
+                      <a:round/>
+                      <a:headEnd type="none" w="med" len="med"/>
+                      <a:tailEnd type="none" w="med" len="med"/>
+                    </a:lnR>
+                    <a:lnT w="6350" cap="flat" cmpd="sng" algn="ctr">
+                      <a:solidFill>
+                        <a:srgbClr val="E4DADD"/>
+                      </a:solidFill>
+                      <a:prstDash val="solid"/>
+                      <a:round/>
+                      <a:headEnd type="none" w="med" len="med"/>
+                      <a:tailEnd type="none" w="med" len="med"/>
+                    </a:lnT>
+                    <a:lnB w="6350" cap="flat" cmpd="sng" algn="ctr">
+                      <a:solidFill>
+                        <a:srgbClr val="E4DADD"/>
+                      </a:solidFill>
+                      <a:prstDash val="solid"/>
+                      <a:round/>
+                      <a:headEnd type="none" w="med" len="med"/>
+                      <a:tailEnd type="none" w="med" len="med"/>
+                    </a:lnB>
+                    <a:solidFill>
+                      <a:srgbClr val="6D2E46"/>
+                    </a:solidFill>
+                  </a:tcPr>
+                </a:tc>
+                <a:tc>
+                  <a:txBody>
+                    <a:bodyPr/>
+                    <a:lstStyle/>
+                    <a:p>
+                      <a:pPr algn="r" indent="0" marL="0">
+                        <a:buNone/>
+                      </a:pPr>
+                      <a:r>
+                        <a:rPr lang="en-US" sz="950" b="1" dirty="0">
+                          <a:solidFill>
+                            <a:srgbClr val="FFFFFF"/>
+                          </a:solidFill>
+                          <a:latin typeface="Calibri" pitchFamily="34" charset="0"/>
+                          <a:ea typeface="Calibri" pitchFamily="34" charset="-122"/>
+                          <a:cs typeface="Calibri" pitchFamily="34" charset="-120"/>
+                        </a:rPr>
+                        <a:t>双方合計の税負担</a:t>
+                      </a:r>
+                      <a:endParaRPr lang="en-US" sz="950" dirty="0">
+                        <a:latin typeface="Calibri" charset="0"/>
+                        <a:ea typeface="Calibri" charset="0"/>
+                        <a:cs typeface="Calibri" charset="0"/>
+                      </a:endParaRPr>
+                    </a:p>
+                  </a:txBody>
+                  <a:tcPr marL="76200" marR="76200" marT="38100" marB="38100" anchor="ctr">
                     <a:lnL w="6350" cap="flat" cmpd="sng" algn="ctr">
                       <a:solidFill>
                         <a:srgbClr val="E4DADD"/>
@@ -3043,7 +1840,7 @@
                   </a:tcPr>
                 </a:tc>
               </a:tr>
-              <a:tr h="566928">
+              <a:tr h="502920">
                 <a:tc>
                   <a:txBody>
                     <a:bodyPr/>
@@ -3061,28 +1858,7 @@
                           <a:ea typeface="Calibri" pitchFamily="34" charset="-122"/>
                           <a:cs typeface="Calibri" pitchFamily="34" charset="-120"/>
                         </a:rPr>
-                        <a:t>株式対価</a:t>
-                      </a:r>
-                      <a:endParaRPr lang="en-US" sz="950" dirty="0">
-                        <a:latin typeface="Calibri" charset="0"/>
-                        <a:ea typeface="Calibri" charset="0"/>
-                        <a:cs typeface="Calibri" charset="0"/>
-                      </a:endParaRPr>
-                    </a:p>
-                    <a:p>
-                      <a:pPr indent="0" marL="0">
-                        <a:buNone/>
-                      </a:pPr>
-                      <a:r>
-                        <a:rPr lang="en-US" sz="950" b="1" dirty="0">
-                          <a:solidFill>
-                            <a:srgbClr val="1F1A1C"/>
-                          </a:solidFill>
-                          <a:latin typeface="Calibri" pitchFamily="34" charset="0"/>
-                          <a:ea typeface="Calibri" pitchFamily="34" charset="-122"/>
-                          <a:cs typeface="Calibri" pitchFamily="34" charset="-120"/>
-                        </a:rPr>
-                        <a:t>（10/9の枠組み）</a:t>
+                        <a:t>従来どおり賞与で支給</a:t>
                       </a:r>
                       <a:endParaRPr lang="en-US" sz="950" dirty="0">
                         <a:latin typeface="Calibri" charset="0"/>
@@ -3091,7 +1867,7 @@
                       </a:endParaRPr>
                     </a:p>
                   </a:txBody>
-                  <a:tcPr marL="63500" marR="63500" marT="38100" marB="38100" anchor="ctr">
+                  <a:tcPr marL="76200" marR="76200" marT="38100" marB="38100" anchor="ctr">
                     <a:lnL w="6350" cap="flat" cmpd="sng" algn="ctr">
                       <a:solidFill>
                         <a:srgbClr val="E4DADD"/>
@@ -3147,7 +1923,290 @@
                           <a:ea typeface="Calibri" pitchFamily="34" charset="-122"/>
                           <a:cs typeface="Calibri" pitchFamily="34" charset="-120"/>
                         </a:rPr>
-                        <a:t>約3.19億円</a:t>
+                        <a:t>約1億1,250万円</a:t>
+                      </a:r>
+                      <a:endParaRPr lang="en-US" sz="950" dirty="0">
+                        <a:latin typeface="Calibri" charset="0"/>
+                        <a:ea typeface="Calibri" charset="0"/>
+                        <a:cs typeface="Calibri" charset="0"/>
+                      </a:endParaRPr>
+                    </a:p>
+                    <a:p>
+                      <a:pPr algn="r" indent="0" marL="0">
+                        <a:buNone/>
+                      </a:pPr>
+                      <a:r>
+                        <a:rPr lang="en-US" sz="950" dirty="0">
+                          <a:solidFill>
+                            <a:srgbClr val="1F1A1C"/>
+                          </a:solidFill>
+                          <a:latin typeface="Calibri" pitchFamily="34" charset="0"/>
+                          <a:ea typeface="Calibri" pitchFamily="34" charset="-122"/>
+                          <a:cs typeface="Calibri" pitchFamily="34" charset="-120"/>
+                        </a:rPr>
+                        <a:t>（税率50%と仮定）</a:t>
+                      </a:r>
+                      <a:endParaRPr lang="en-US" sz="950" dirty="0">
+                        <a:latin typeface="Calibri" charset="0"/>
+                        <a:ea typeface="Calibri" charset="0"/>
+                        <a:cs typeface="Calibri" charset="0"/>
+                      </a:endParaRPr>
+                    </a:p>
+                  </a:txBody>
+                  <a:tcPr marL="76200" marR="76200" marT="38100" marB="38100" anchor="ctr">
+                    <a:lnL w="6350" cap="flat" cmpd="sng" algn="ctr">
+                      <a:solidFill>
+                        <a:srgbClr val="E4DADD"/>
+                      </a:solidFill>
+                      <a:prstDash val="solid"/>
+                      <a:round/>
+                      <a:headEnd type="none" w="med" len="med"/>
+                      <a:tailEnd type="none" w="med" len="med"/>
+                    </a:lnL>
+                    <a:lnR w="6350" cap="flat" cmpd="sng" algn="ctr">
+                      <a:solidFill>
+                        <a:srgbClr val="E4DADD"/>
+                      </a:solidFill>
+                      <a:prstDash val="solid"/>
+                      <a:round/>
+                      <a:headEnd type="none" w="med" len="med"/>
+                      <a:tailEnd type="none" w="med" len="med"/>
+                    </a:lnR>
+                    <a:lnT w="6350" cap="flat" cmpd="sng" algn="ctr">
+                      <a:solidFill>
+                        <a:srgbClr val="E4DADD"/>
+                      </a:solidFill>
+                      <a:prstDash val="solid"/>
+                      <a:round/>
+                      <a:headEnd type="none" w="med" len="med"/>
+                      <a:tailEnd type="none" w="med" len="med"/>
+                    </a:lnT>
+                    <a:lnB w="6350" cap="flat" cmpd="sng" algn="ctr">
+                      <a:solidFill>
+                        <a:srgbClr val="E4DADD"/>
+                      </a:solidFill>
+                      <a:prstDash val="solid"/>
+                      <a:round/>
+                      <a:headEnd type="none" w="med" len="med"/>
+                      <a:tailEnd type="none" w="med" len="med"/>
+                    </a:lnB>
+                  </a:tcPr>
+                </a:tc>
+                <a:tc>
+                  <a:txBody>
+                    <a:bodyPr/>
+                    <a:lstStyle/>
+                    <a:p>
+                      <a:pPr algn="r" indent="0" marL="0">
+                        <a:buNone/>
+                      </a:pPr>
+                      <a:r>
+                        <a:rPr lang="en-US" sz="950" dirty="0">
+                          <a:solidFill>
+                            <a:srgbClr val="1F1A1C"/>
+                          </a:solidFill>
+                          <a:latin typeface="Calibri" pitchFamily="34" charset="0"/>
+                          <a:ea typeface="Calibri" pitchFamily="34" charset="-122"/>
+                          <a:cs typeface="Calibri" pitchFamily="34" charset="-120"/>
+                        </a:rPr>
+                        <a:t>約7,740万円</a:t>
+                      </a:r>
+                      <a:endParaRPr lang="en-US" sz="950" dirty="0">
+                        <a:latin typeface="Calibri" charset="0"/>
+                        <a:ea typeface="Calibri" charset="0"/>
+                        <a:cs typeface="Calibri" charset="0"/>
+                      </a:endParaRPr>
+                    </a:p>
+                  </a:txBody>
+                  <a:tcPr marL="76200" marR="76200" marT="38100" marB="38100" anchor="ctr">
+                    <a:lnL w="6350" cap="flat" cmpd="sng" algn="ctr">
+                      <a:solidFill>
+                        <a:srgbClr val="E4DADD"/>
+                      </a:solidFill>
+                      <a:prstDash val="solid"/>
+                      <a:round/>
+                      <a:headEnd type="none" w="med" len="med"/>
+                      <a:tailEnd type="none" w="med" len="med"/>
+                    </a:lnL>
+                    <a:lnR w="6350" cap="flat" cmpd="sng" algn="ctr">
+                      <a:solidFill>
+                        <a:srgbClr val="E4DADD"/>
+                      </a:solidFill>
+                      <a:prstDash val="solid"/>
+                      <a:round/>
+                      <a:headEnd type="none" w="med" len="med"/>
+                      <a:tailEnd type="none" w="med" len="med"/>
+                    </a:lnR>
+                    <a:lnT w="6350" cap="flat" cmpd="sng" algn="ctr">
+                      <a:solidFill>
+                        <a:srgbClr val="E4DADD"/>
+                      </a:solidFill>
+                      <a:prstDash val="solid"/>
+                      <a:round/>
+                      <a:headEnd type="none" w="med" len="med"/>
+                      <a:tailEnd type="none" w="med" len="med"/>
+                    </a:lnT>
+                    <a:lnB w="6350" cap="flat" cmpd="sng" algn="ctr">
+                      <a:solidFill>
+                        <a:srgbClr val="E4DADD"/>
+                      </a:solidFill>
+                      <a:prstDash val="solid"/>
+                      <a:round/>
+                      <a:headEnd type="none" w="med" len="med"/>
+                      <a:tailEnd type="none" w="med" len="med"/>
+                    </a:lnB>
+                  </a:tcPr>
+                </a:tc>
+                <a:tc>
+                  <a:txBody>
+                    <a:bodyPr/>
+                    <a:lstStyle/>
+                    <a:p>
+                      <a:pPr algn="r" indent="0" marL="0">
+                        <a:buNone/>
+                      </a:pPr>
+                      <a:r>
+                        <a:rPr lang="en-US" sz="950" dirty="0">
+                          <a:solidFill>
+                            <a:srgbClr val="1F1A1C"/>
+                          </a:solidFill>
+                          <a:latin typeface="Calibri" pitchFamily="34" charset="0"/>
+                          <a:ea typeface="Calibri" pitchFamily="34" charset="-122"/>
+                          <a:cs typeface="Calibri" pitchFamily="34" charset="-120"/>
+                        </a:rPr>
+                        <a:t>約3,510万円</a:t>
+                      </a:r>
+                      <a:endParaRPr lang="en-US" sz="950" dirty="0">
+                        <a:latin typeface="Calibri" charset="0"/>
+                        <a:ea typeface="Calibri" charset="0"/>
+                        <a:cs typeface="Calibri" charset="0"/>
+                      </a:endParaRPr>
+                    </a:p>
+                  </a:txBody>
+                  <a:tcPr marL="76200" marR="76200" marT="38100" marB="38100" anchor="ctr">
+                    <a:lnL w="6350" cap="flat" cmpd="sng" algn="ctr">
+                      <a:solidFill>
+                        <a:srgbClr val="E4DADD"/>
+                      </a:solidFill>
+                      <a:prstDash val="solid"/>
+                      <a:round/>
+                      <a:headEnd type="none" w="med" len="med"/>
+                      <a:tailEnd type="none" w="med" len="med"/>
+                    </a:lnL>
+                    <a:lnR w="6350" cap="flat" cmpd="sng" algn="ctr">
+                      <a:solidFill>
+                        <a:srgbClr val="E4DADD"/>
+                      </a:solidFill>
+                      <a:prstDash val="solid"/>
+                      <a:round/>
+                      <a:headEnd type="none" w="med" len="med"/>
+                      <a:tailEnd type="none" w="med" len="med"/>
+                    </a:lnR>
+                    <a:lnT w="6350" cap="flat" cmpd="sng" algn="ctr">
+                      <a:solidFill>
+                        <a:srgbClr val="E4DADD"/>
+                      </a:solidFill>
+                      <a:prstDash val="solid"/>
+                      <a:round/>
+                      <a:headEnd type="none" w="med" len="med"/>
+                      <a:tailEnd type="none" w="med" len="med"/>
+                    </a:lnT>
+                    <a:lnB w="6350" cap="flat" cmpd="sng" algn="ctr">
+                      <a:solidFill>
+                        <a:srgbClr val="E4DADD"/>
+                      </a:solidFill>
+                      <a:prstDash val="solid"/>
+                      <a:round/>
+                      <a:headEnd type="none" w="med" len="med"/>
+                      <a:tailEnd type="none" w="med" len="med"/>
+                    </a:lnB>
+                  </a:tcPr>
+                </a:tc>
+              </a:tr>
+              <a:tr h="502920">
+                <a:tc>
+                  <a:txBody>
+                    <a:bodyPr/>
+                    <a:lstStyle/>
+                    <a:p>
+                      <a:pPr indent="0" marL="0">
+                        <a:buNone/>
+                      </a:pPr>
+                      <a:r>
+                        <a:rPr lang="en-US" sz="950" b="1" dirty="0">
+                          <a:solidFill>
+                            <a:srgbClr val="1F1A1C"/>
+                          </a:solidFill>
+                          <a:latin typeface="Calibri" pitchFamily="34" charset="0"/>
+                          <a:ea typeface="Calibri" pitchFamily="34" charset="-122"/>
+                          <a:cs typeface="Calibri" pitchFamily="34" charset="-120"/>
+                        </a:rPr>
+                        <a:t>株式対価（10/9の枠組み）</a:t>
+                      </a:r>
+                      <a:endParaRPr lang="en-US" sz="950" dirty="0">
+                        <a:latin typeface="Calibri" charset="0"/>
+                        <a:ea typeface="Calibri" charset="0"/>
+                        <a:cs typeface="Calibri" charset="0"/>
+                      </a:endParaRPr>
+                    </a:p>
+                  </a:txBody>
+                  <a:tcPr marL="76200" marR="76200" marT="38100" marB="38100" anchor="ctr">
+                    <a:lnL w="6350" cap="flat" cmpd="sng" algn="ctr">
+                      <a:solidFill>
+                        <a:srgbClr val="E4DADD"/>
+                      </a:solidFill>
+                      <a:prstDash val="solid"/>
+                      <a:round/>
+                      <a:headEnd type="none" w="med" len="med"/>
+                      <a:tailEnd type="none" w="med" len="med"/>
+                    </a:lnL>
+                    <a:lnR w="6350" cap="flat" cmpd="sng" algn="ctr">
+                      <a:solidFill>
+                        <a:srgbClr val="E4DADD"/>
+                      </a:solidFill>
+                      <a:prstDash val="solid"/>
+                      <a:round/>
+                      <a:headEnd type="none" w="med" len="med"/>
+                      <a:tailEnd type="none" w="med" len="med"/>
+                    </a:lnR>
+                    <a:lnT w="6350" cap="flat" cmpd="sng" algn="ctr">
+                      <a:solidFill>
+                        <a:srgbClr val="E4DADD"/>
+                      </a:solidFill>
+                      <a:prstDash val="solid"/>
+                      <a:round/>
+                      <a:headEnd type="none" w="med" len="med"/>
+                      <a:tailEnd type="none" w="med" len="med"/>
+                    </a:lnT>
+                    <a:lnB w="6350" cap="flat" cmpd="sng" algn="ctr">
+                      <a:solidFill>
+                        <a:srgbClr val="E4DADD"/>
+                      </a:solidFill>
+                      <a:prstDash val="solid"/>
+                      <a:round/>
+                      <a:headEnd type="none" w="med" len="med"/>
+                      <a:tailEnd type="none" w="med" len="med"/>
+                    </a:lnB>
+                  </a:tcPr>
+                </a:tc>
+                <a:tc>
+                  <a:txBody>
+                    <a:bodyPr/>
+                    <a:lstStyle/>
+                    <a:p>
+                      <a:pPr algn="r" indent="0" marL="0">
+                        <a:buNone/>
+                      </a:pPr>
+                      <a:r>
+                        <a:rPr lang="en-US" sz="950" dirty="0">
+                          <a:solidFill>
+                            <a:srgbClr val="1F1A1C"/>
+                          </a:solidFill>
+                          <a:latin typeface="Calibri" pitchFamily="34" charset="0"/>
+                          <a:ea typeface="Calibri" pitchFamily="34" charset="-122"/>
+                          <a:cs typeface="Calibri" pitchFamily="34" charset="-120"/>
+                        </a:rPr>
+                        <a:t>約4,570万円</a:t>
                       </a:r>
                       <a:endParaRPr lang="en-US" sz="950" dirty="0">
                         <a:latin typeface="Calibri" charset="0"/>
@@ -3177,7 +2236,7 @@
                       </a:endParaRPr>
                     </a:p>
                   </a:txBody>
-                  <a:tcPr marL="63500" marR="63500" marT="38100" marB="38100" anchor="ctr">
+                  <a:tcPr marL="76200" marR="76200" marT="38100" marB="38100" anchor="ctr">
                     <a:lnL w="6350" cap="flat" cmpd="sng" algn="ctr">
                       <a:solidFill>
                         <a:srgbClr val="E4DADD"/>
@@ -3242,160 +2301,7 @@
                       </a:endParaRPr>
                     </a:p>
                   </a:txBody>
-                  <a:tcPr marL="63500" marR="63500" marT="38100" marB="38100" anchor="ctr">
-                    <a:lnL w="6350" cap="flat" cmpd="sng" algn="ctr">
-                      <a:solidFill>
-                        <a:srgbClr val="E4DADD"/>
-                      </a:solidFill>
-                      <a:prstDash val="solid"/>
-                      <a:round/>
-                      <a:headEnd type="none" w="med" len="med"/>
-                      <a:tailEnd type="none" w="med" len="med"/>
-                    </a:lnL>
-                    <a:lnR w="6350" cap="flat" cmpd="sng" algn="ctr">
-                      <a:solidFill>
-                        <a:srgbClr val="E4DADD"/>
-                      </a:solidFill>
-                      <a:prstDash val="solid"/>
-                      <a:round/>
-                      <a:headEnd type="none" w="med" len="med"/>
-                      <a:tailEnd type="none" w="med" len="med"/>
-                    </a:lnR>
-                    <a:lnT w="6350" cap="flat" cmpd="sng" algn="ctr">
-                      <a:solidFill>
-                        <a:srgbClr val="E4DADD"/>
-                      </a:solidFill>
-                      <a:prstDash val="solid"/>
-                      <a:round/>
-                      <a:headEnd type="none" w="med" len="med"/>
-                      <a:tailEnd type="none" w="med" len="med"/>
-                    </a:lnT>
-                    <a:lnB w="6350" cap="flat" cmpd="sng" algn="ctr">
-                      <a:solidFill>
-                        <a:srgbClr val="E4DADD"/>
-                      </a:solidFill>
-                      <a:prstDash val="solid"/>
-                      <a:round/>
-                      <a:headEnd type="none" w="med" len="med"/>
-                      <a:tailEnd type="none" w="med" len="med"/>
-                    </a:lnB>
-                  </a:tcPr>
-                </a:tc>
-              </a:tr>
-              <a:tr h="566928">
-                <a:tc>
-                  <a:txBody>
-                    <a:bodyPr/>
-                    <a:lstStyle/>
-                    <a:p>
-                      <a:pPr indent="0" marL="0">
-                        <a:buNone/>
-                      </a:pPr>
-                      <a:r>
-                        <a:rPr lang="en-US" sz="950" b="1" dirty="0">
-                          <a:solidFill>
-                            <a:srgbClr val="1F1A1C"/>
-                          </a:solidFill>
-                          <a:latin typeface="Calibri" pitchFamily="34" charset="0"/>
-                          <a:ea typeface="Calibri" pitchFamily="34" charset="-122"/>
-                          <a:cs typeface="Calibri" pitchFamily="34" charset="-120"/>
-                        </a:rPr>
-                        <a:t>役員報酬（賞与）</a:t>
-                      </a:r>
-                      <a:endParaRPr lang="en-US" sz="950" dirty="0">
-                        <a:latin typeface="Calibri" charset="0"/>
-                        <a:ea typeface="Calibri" charset="0"/>
-                        <a:cs typeface="Calibri" charset="0"/>
-                      </a:endParaRPr>
-                    </a:p>
-                  </a:txBody>
-                  <a:tcPr marL="63500" marR="63500" marT="38100" marB="38100" anchor="ctr">
-                    <a:lnL w="6350" cap="flat" cmpd="sng" algn="ctr">
-                      <a:solidFill>
-                        <a:srgbClr val="E4DADD"/>
-                      </a:solidFill>
-                      <a:prstDash val="solid"/>
-                      <a:round/>
-                      <a:headEnd type="none" w="med" len="med"/>
-                      <a:tailEnd type="none" w="med" len="med"/>
-                    </a:lnL>
-                    <a:lnR w="6350" cap="flat" cmpd="sng" algn="ctr">
-                      <a:solidFill>
-                        <a:srgbClr val="E4DADD"/>
-                      </a:solidFill>
-                      <a:prstDash val="solid"/>
-                      <a:round/>
-                      <a:headEnd type="none" w="med" len="med"/>
-                      <a:tailEnd type="none" w="med" len="med"/>
-                    </a:lnR>
-                    <a:lnT w="6350" cap="flat" cmpd="sng" algn="ctr">
-                      <a:solidFill>
-                        <a:srgbClr val="E4DADD"/>
-                      </a:solidFill>
-                      <a:prstDash val="solid"/>
-                      <a:round/>
-                      <a:headEnd type="none" w="med" len="med"/>
-                      <a:tailEnd type="none" w="med" len="med"/>
-                    </a:lnT>
-                    <a:lnB w="6350" cap="flat" cmpd="sng" algn="ctr">
-                      <a:solidFill>
-                        <a:srgbClr val="E4DADD"/>
-                      </a:solidFill>
-                      <a:prstDash val="solid"/>
-                      <a:round/>
-                      <a:headEnd type="none" w="med" len="med"/>
-                      <a:tailEnd type="none" w="med" len="med"/>
-                    </a:lnB>
-                  </a:tcPr>
-                </a:tc>
-                <a:tc>
-                  <a:txBody>
-                    <a:bodyPr/>
-                    <a:lstStyle/>
-                    <a:p>
-                      <a:pPr algn="r" indent="0" marL="0">
-                        <a:buNone/>
-                      </a:pPr>
-                      <a:r>
-                        <a:rPr lang="en-US" sz="950" b="1" dirty="0">
-                          <a:solidFill>
-                            <a:srgbClr val="9B2C2C"/>
-                          </a:solidFill>
-                          <a:latin typeface="Calibri" pitchFamily="34" charset="0"/>
-                          <a:ea typeface="Calibri" pitchFamily="34" charset="-122"/>
-                          <a:cs typeface="Calibri" pitchFamily="34" charset="-120"/>
-                        </a:rPr>
-                        <a:t>約1.82億円</a:t>
-                      </a:r>
-                      <a:endParaRPr lang="en-US" sz="950" dirty="0">
-                        <a:latin typeface="Calibri" charset="0"/>
-                        <a:ea typeface="Calibri" charset="0"/>
-                        <a:cs typeface="Calibri" charset="0"/>
-                      </a:endParaRPr>
-                    </a:p>
-                    <a:p>
-                      <a:pPr algn="r" indent="0" marL="0">
-                        <a:buNone/>
-                      </a:pPr>
-                      <a:r>
-                        <a:rPr lang="en-US" sz="950" b="1" dirty="0">
-                          <a:solidFill>
-                            <a:srgbClr val="9B2C2C"/>
-                          </a:solidFill>
-                          <a:latin typeface="Calibri" pitchFamily="34" charset="0"/>
-                          <a:ea typeface="Calibri" pitchFamily="34" charset="-122"/>
-                          <a:cs typeface="Calibri" pitchFamily="34" charset="-120"/>
-                        </a:rPr>
-                        <a:t>（税率約54%）</a:t>
-                      </a:r>
-                      <a:endParaRPr lang="en-US" sz="950" dirty="0">
-                        <a:latin typeface="Calibri" charset="0"/>
-                        <a:ea typeface="Calibri" charset="0"/>
-                        <a:cs typeface="Calibri" charset="0"/>
-                      </a:endParaRPr>
-                    </a:p>
-                  </a:txBody>
-                  <a:tcPr marL="63500" marR="63500" marT="38100" marB="38100" anchor="ctr">
+                  <a:tcPr marL="76200" marR="76200" marT="38100" marB="38100" anchor="ctr">
                     <a:lnL w="6350" cap="flat" cmpd="sng" algn="ctr">
                       <a:solidFill>
                         <a:srgbClr val="E4DADD"/>
@@ -3451,7 +2357,7 @@
                           <a:ea typeface="Calibri" pitchFamily="34" charset="-122"/>
                           <a:cs typeface="Calibri" pitchFamily="34" charset="-120"/>
                         </a:rPr>
-                        <a:t>約1.38億円</a:t>
+                        <a:t>約4,570万円</a:t>
                       </a:r>
                       <a:endParaRPr lang="en-US" sz="950" dirty="0">
                         <a:latin typeface="Calibri" charset="0"/>
@@ -3460,7 +2366,7 @@
                       </a:endParaRPr>
                     </a:p>
                   </a:txBody>
-                  <a:tcPr marL="63500" marR="63500" marT="38100" marB="38100" anchor="ctr">
+                  <a:tcPr marL="76200" marR="76200" marT="38100" marB="38100" anchor="ctr">
                     <a:lnL w="6350" cap="flat" cmpd="sng" algn="ctr">
                       <a:solidFill>
                         <a:srgbClr val="E4DADD"/>
@@ -3497,6 +2403,343 @@
                       <a:headEnd type="none" w="med" len="med"/>
                       <a:tailEnd type="none" w="med" len="med"/>
                     </a:lnB>
+                  </a:tcPr>
+                </a:tc>
+              </a:tr>
+              <a:tr h="566928">
+                <a:tc>
+                  <a:txBody>
+                    <a:bodyPr/>
+                    <a:lstStyle/>
+                    <a:p>
+                      <a:pPr indent="0" marL="0">
+                        <a:buNone/>
+                      </a:pPr>
+                      <a:r>
+                        <a:rPr lang="en-US" sz="950" b="1" dirty="0">
+                          <a:solidFill>
+                            <a:srgbClr val="6D2E46"/>
+                          </a:solidFill>
+                          <a:latin typeface="Calibri" pitchFamily="34" charset="0"/>
+                          <a:ea typeface="Calibri" pitchFamily="34" charset="-122"/>
+                          <a:cs typeface="Calibri" pitchFamily="34" charset="-120"/>
+                        </a:rPr>
+                        <a:t>役員退職金（決済時）</a:t>
+                      </a:r>
+                      <a:endParaRPr lang="en-US" sz="950" dirty="0">
+                        <a:latin typeface="Calibri" charset="0"/>
+                        <a:ea typeface="Calibri" charset="0"/>
+                        <a:cs typeface="Calibri" charset="0"/>
+                      </a:endParaRPr>
+                    </a:p>
+                    <a:p>
+                      <a:pPr indent="0" marL="0">
+                        <a:buNone/>
+                      </a:pPr>
+                      <a:r>
+                        <a:rPr lang="en-US" sz="950" b="1" dirty="0">
+                          <a:solidFill>
+                            <a:srgbClr val="6D2E46"/>
+                          </a:solidFill>
+                          <a:latin typeface="Calibri" pitchFamily="34" charset="0"/>
+                          <a:ea typeface="Calibri" pitchFamily="34" charset="-122"/>
+                          <a:cs typeface="Calibri" pitchFamily="34" charset="-120"/>
+                        </a:rPr>
+                        <a:t>ご提案</a:t>
+                      </a:r>
+                      <a:endParaRPr lang="en-US" sz="950" dirty="0">
+                        <a:latin typeface="Calibri" charset="0"/>
+                        <a:ea typeface="Calibri" charset="0"/>
+                        <a:cs typeface="Calibri" charset="0"/>
+                      </a:endParaRPr>
+                    </a:p>
+                  </a:txBody>
+                  <a:tcPr marL="76200" marR="76200" marT="38100" marB="38100" anchor="ctr">
+                    <a:lnL w="6350" cap="flat" cmpd="sng" algn="ctr">
+                      <a:solidFill>
+                        <a:srgbClr val="E4DADD"/>
+                      </a:solidFill>
+                      <a:prstDash val="solid"/>
+                      <a:round/>
+                      <a:headEnd type="none" w="med" len="med"/>
+                      <a:tailEnd type="none" w="med" len="med"/>
+                    </a:lnL>
+                    <a:lnR w="6350" cap="flat" cmpd="sng" algn="ctr">
+                      <a:solidFill>
+                        <a:srgbClr val="E4DADD"/>
+                      </a:solidFill>
+                      <a:prstDash val="solid"/>
+                      <a:round/>
+                      <a:headEnd type="none" w="med" len="med"/>
+                      <a:tailEnd type="none" w="med" len="med"/>
+                    </a:lnR>
+                    <a:lnT w="6350" cap="flat" cmpd="sng" algn="ctr">
+                      <a:solidFill>
+                        <a:srgbClr val="E4DADD"/>
+                      </a:solidFill>
+                      <a:prstDash val="solid"/>
+                      <a:round/>
+                      <a:headEnd type="none" w="med" len="med"/>
+                      <a:tailEnd type="none" w="med" len="med"/>
+                    </a:lnT>
+                    <a:lnB w="6350" cap="flat" cmpd="sng" algn="ctr">
+                      <a:solidFill>
+                        <a:srgbClr val="E4DADD"/>
+                      </a:solidFill>
+                      <a:prstDash val="solid"/>
+                      <a:round/>
+                      <a:headEnd type="none" w="med" len="med"/>
+                      <a:tailEnd type="none" w="med" len="med"/>
+                    </a:lnB>
+                    <a:solidFill>
+                      <a:srgbClr val="EAF2ED"/>
+                    </a:solidFill>
+                  </a:tcPr>
+                </a:tc>
+                <a:tc>
+                  <a:txBody>
+                    <a:bodyPr/>
+                    <a:lstStyle/>
+                    <a:p>
+                      <a:pPr algn="r" indent="0" marL="0">
+                        <a:buNone/>
+                      </a:pPr>
+                      <a:r>
+                        <a:rPr lang="en-US" sz="950" dirty="0">
+                          <a:solidFill>
+                            <a:srgbClr val="1F1A1C"/>
+                          </a:solidFill>
+                          <a:latin typeface="Calibri" pitchFamily="34" charset="0"/>
+                          <a:ea typeface="Calibri" pitchFamily="34" charset="-122"/>
+                          <a:cs typeface="Calibri" pitchFamily="34" charset="-120"/>
+                        </a:rPr>
+                        <a:t>約5,630万円</a:t>
+                      </a:r>
+                      <a:endParaRPr lang="en-US" sz="950" dirty="0">
+                        <a:latin typeface="Calibri" charset="0"/>
+                        <a:ea typeface="Calibri" charset="0"/>
+                        <a:cs typeface="Calibri" charset="0"/>
+                      </a:endParaRPr>
+                    </a:p>
+                    <a:p>
+                      <a:pPr algn="r" indent="0" marL="0">
+                        <a:buNone/>
+                      </a:pPr>
+                      <a:r>
+                        <a:rPr lang="en-US" sz="950" dirty="0">
+                          <a:solidFill>
+                            <a:srgbClr val="1F1A1C"/>
+                          </a:solidFill>
+                          <a:latin typeface="Calibri" pitchFamily="34" charset="0"/>
+                          <a:ea typeface="Calibri" pitchFamily="34" charset="-122"/>
+                          <a:cs typeface="Calibri" pitchFamily="34" charset="-120"/>
+                        </a:rPr>
+                        <a:t>（実効 約25%）</a:t>
+                      </a:r>
+                      <a:endParaRPr lang="en-US" sz="950" dirty="0">
+                        <a:latin typeface="Calibri" charset="0"/>
+                        <a:ea typeface="Calibri" charset="0"/>
+                        <a:cs typeface="Calibri" charset="0"/>
+                      </a:endParaRPr>
+                    </a:p>
+                  </a:txBody>
+                  <a:tcPr marL="76200" marR="76200" marT="38100" marB="38100" anchor="ctr">
+                    <a:lnL w="6350" cap="flat" cmpd="sng" algn="ctr">
+                      <a:solidFill>
+                        <a:srgbClr val="E4DADD"/>
+                      </a:solidFill>
+                      <a:prstDash val="solid"/>
+                      <a:round/>
+                      <a:headEnd type="none" w="med" len="med"/>
+                      <a:tailEnd type="none" w="med" len="med"/>
+                    </a:lnL>
+                    <a:lnR w="6350" cap="flat" cmpd="sng" algn="ctr">
+                      <a:solidFill>
+                        <a:srgbClr val="E4DADD"/>
+                      </a:solidFill>
+                      <a:prstDash val="solid"/>
+                      <a:round/>
+                      <a:headEnd type="none" w="med" len="med"/>
+                      <a:tailEnd type="none" w="med" len="med"/>
+                    </a:lnR>
+                    <a:lnT w="6350" cap="flat" cmpd="sng" algn="ctr">
+                      <a:solidFill>
+                        <a:srgbClr val="E4DADD"/>
+                      </a:solidFill>
+                      <a:prstDash val="solid"/>
+                      <a:round/>
+                      <a:headEnd type="none" w="med" len="med"/>
+                      <a:tailEnd type="none" w="med" len="med"/>
+                    </a:lnT>
+                    <a:lnB w="6350" cap="flat" cmpd="sng" algn="ctr">
+                      <a:solidFill>
+                        <a:srgbClr val="E4DADD"/>
+                      </a:solidFill>
+                      <a:prstDash val="solid"/>
+                      <a:round/>
+                      <a:headEnd type="none" w="med" len="med"/>
+                      <a:tailEnd type="none" w="med" len="med"/>
+                    </a:lnB>
+                    <a:solidFill>
+                      <a:srgbClr val="EAF2ED"/>
+                    </a:solidFill>
+                  </a:tcPr>
+                </a:tc>
+                <a:tc>
+                  <a:txBody>
+                    <a:bodyPr/>
+                    <a:lstStyle/>
+                    <a:p>
+                      <a:pPr algn="r" indent="0" marL="0">
+                        <a:buNone/>
+                      </a:pPr>
+                      <a:r>
+                        <a:rPr lang="en-US" sz="950" b="1" dirty="0">
+                          <a:solidFill>
+                            <a:srgbClr val="2E6F4E"/>
+                          </a:solidFill>
+                          <a:latin typeface="Calibri" pitchFamily="34" charset="0"/>
+                          <a:ea typeface="Calibri" pitchFamily="34" charset="-122"/>
+                          <a:cs typeface="Calibri" pitchFamily="34" charset="-120"/>
+                        </a:rPr>
+                        <a:t>約7,740万円</a:t>
+                      </a:r>
+                      <a:endParaRPr lang="en-US" sz="950" dirty="0">
+                        <a:latin typeface="Calibri" charset="0"/>
+                        <a:ea typeface="Calibri" charset="0"/>
+                        <a:cs typeface="Calibri" charset="0"/>
+                      </a:endParaRPr>
+                    </a:p>
+                  </a:txBody>
+                  <a:tcPr marL="76200" marR="76200" marT="38100" marB="38100" anchor="ctr">
+                    <a:lnL w="6350" cap="flat" cmpd="sng" algn="ctr">
+                      <a:solidFill>
+                        <a:srgbClr val="E4DADD"/>
+                      </a:solidFill>
+                      <a:prstDash val="solid"/>
+                      <a:round/>
+                      <a:headEnd type="none" w="med" len="med"/>
+                      <a:tailEnd type="none" w="med" len="med"/>
+                    </a:lnL>
+                    <a:lnR w="6350" cap="flat" cmpd="sng" algn="ctr">
+                      <a:solidFill>
+                        <a:srgbClr val="E4DADD"/>
+                      </a:solidFill>
+                      <a:prstDash val="solid"/>
+                      <a:round/>
+                      <a:headEnd type="none" w="med" len="med"/>
+                      <a:tailEnd type="none" w="med" len="med"/>
+                    </a:lnR>
+                    <a:lnT w="6350" cap="flat" cmpd="sng" algn="ctr">
+                      <a:solidFill>
+                        <a:srgbClr val="E4DADD"/>
+                      </a:solidFill>
+                      <a:prstDash val="solid"/>
+                      <a:round/>
+                      <a:headEnd type="none" w="med" len="med"/>
+                      <a:tailEnd type="none" w="med" len="med"/>
+                    </a:lnT>
+                    <a:lnB w="6350" cap="flat" cmpd="sng" algn="ctr">
+                      <a:solidFill>
+                        <a:srgbClr val="E4DADD"/>
+                      </a:solidFill>
+                      <a:prstDash val="solid"/>
+                      <a:round/>
+                      <a:headEnd type="none" w="med" len="med"/>
+                      <a:tailEnd type="none" w="med" len="med"/>
+                    </a:lnB>
+                    <a:solidFill>
+                      <a:srgbClr val="EAF2ED"/>
+                    </a:solidFill>
+                  </a:tcPr>
+                </a:tc>
+                <a:tc>
+                  <a:txBody>
+                    <a:bodyPr/>
+                    <a:lstStyle/>
+                    <a:p>
+                      <a:pPr algn="r" indent="0" marL="0">
+                        <a:buNone/>
+                      </a:pPr>
+                      <a:r>
+                        <a:rPr lang="en-US" sz="950" b="1" dirty="0">
+                          <a:solidFill>
+                            <a:srgbClr val="2E6F4E"/>
+                          </a:solidFill>
+                          <a:latin typeface="Calibri" pitchFamily="34" charset="0"/>
+                          <a:ea typeface="Calibri" pitchFamily="34" charset="-122"/>
+                          <a:cs typeface="Calibri" pitchFamily="34" charset="-120"/>
+                        </a:rPr>
+                        <a:t>▲約2,110万円</a:t>
+                      </a:r>
+                      <a:endParaRPr lang="en-US" sz="950" dirty="0">
+                        <a:latin typeface="Calibri" charset="0"/>
+                        <a:ea typeface="Calibri" charset="0"/>
+                        <a:cs typeface="Calibri" charset="0"/>
+                      </a:endParaRPr>
+                    </a:p>
+                    <a:p>
+                      <a:pPr algn="r" indent="0" marL="0">
+                        <a:buNone/>
+                      </a:pPr>
+                      <a:r>
+                        <a:rPr lang="en-US" sz="950" b="1" dirty="0">
+                          <a:solidFill>
+                            <a:srgbClr val="2E6F4E"/>
+                          </a:solidFill>
+                          <a:latin typeface="Calibri" pitchFamily="34" charset="0"/>
+                          <a:ea typeface="Calibri" pitchFamily="34" charset="-122"/>
+                          <a:cs typeface="Calibri" pitchFamily="34" charset="-120"/>
+                        </a:rPr>
+                        <a:t>（合計で約6,700万円減）</a:t>
+                      </a:r>
+                      <a:endParaRPr lang="en-US" sz="950" dirty="0">
+                        <a:latin typeface="Calibri" charset="0"/>
+                        <a:ea typeface="Calibri" charset="0"/>
+                        <a:cs typeface="Calibri" charset="0"/>
+                      </a:endParaRPr>
+                    </a:p>
+                  </a:txBody>
+                  <a:tcPr marL="76200" marR="76200" marT="38100" marB="38100" anchor="ctr">
+                    <a:lnL w="6350" cap="flat" cmpd="sng" algn="ctr">
+                      <a:solidFill>
+                        <a:srgbClr val="E4DADD"/>
+                      </a:solidFill>
+                      <a:prstDash val="solid"/>
+                      <a:round/>
+                      <a:headEnd type="none" w="med" len="med"/>
+                      <a:tailEnd type="none" w="med" len="med"/>
+                    </a:lnL>
+                    <a:lnR w="6350" cap="flat" cmpd="sng" algn="ctr">
+                      <a:solidFill>
+                        <a:srgbClr val="E4DADD"/>
+                      </a:solidFill>
+                      <a:prstDash val="solid"/>
+                      <a:round/>
+                      <a:headEnd type="none" w="med" len="med"/>
+                      <a:tailEnd type="none" w="med" len="med"/>
+                    </a:lnR>
+                    <a:lnT w="6350" cap="flat" cmpd="sng" algn="ctr">
+                      <a:solidFill>
+                        <a:srgbClr val="E4DADD"/>
+                      </a:solidFill>
+                      <a:prstDash val="solid"/>
+                      <a:round/>
+                      <a:headEnd type="none" w="med" len="med"/>
+                      <a:tailEnd type="none" w="med" len="med"/>
+                    </a:lnT>
+                    <a:lnB w="6350" cap="flat" cmpd="sng" algn="ctr">
+                      <a:solidFill>
+                        <a:srgbClr val="E4DADD"/>
+                      </a:solidFill>
+                      <a:prstDash val="solid"/>
+                      <a:round/>
+                      <a:headEnd type="none" w="med" len="med"/>
+                      <a:tailEnd type="none" w="med" len="med"/>
+                    </a:lnB>
+                    <a:solidFill>
+                      <a:srgbClr val="EAF2ED"/>
+                    </a:solidFill>
                   </a:tcPr>
                 </a:tc>
               </a:tr>
@@ -3506,18 +2749,99 @@
       </p:graphicFrame>
       <p:sp>
         <p:nvSpPr>
-          <p:cNvPr id="25" name="Shape 21"/>
+          <p:cNvPr id="22" name="Text 19"/>
+          <p:cNvSpPr txBox="1"/>
+          <p:nvPr/>
+        </p:nvSpPr>
+        <p:spPr>
+          <a:xfrm>
+            <a:off x="566928" y="4663440"/>
+            <a:ext cx="6812280" cy="411480"/>
+          </a:xfrm>
+          <a:prstGeom prst="rect">
+            <a:avLst/>
+          </a:prstGeom>
+          <a:noFill/>
+          <a:ln/>
+        </p:spPr>
+        <p:txBody>
+          <a:bodyPr wrap="square" lIns="0" tIns="0" rIns="0" bIns="0" rtlCol="0" anchor="ctr"/>
+          <a:lstStyle/>
+          <a:p>
+            <a:pPr indent="0" marL="0">
+              <a:lnSpc>
+                <a:spcPts val="1150"/>
+              </a:lnSpc>
+              <a:buNone/>
+            </a:pPr>
+            <a:r>
+              <a:rPr lang="en-US" sz="850" dirty="0">
+                <a:solidFill>
+                  <a:srgbClr val="6E6368"/>
+                </a:solidFill>
+                <a:latin typeface="Calibri" pitchFamily="34" charset="0"/>
+                <a:ea typeface="Calibri" pitchFamily="34" charset="-122"/>
+                <a:cs typeface="Calibri" pitchFamily="34" charset="-120"/>
+              </a:rPr>
+              <a:t>※ 双方合計の税負担＝岸田様の税負担−会社の税負担軽減。賞与の税率はデロイト様資料の仮定（50%）。会社の実効税率は34.4%。退職所得は在任20年の退職所得控除（800万円）を適用して試算。</a:t>
+            </a:r>
+            <a:endParaRPr lang="en-US" sz="850" dirty="0"/>
+          </a:p>
+        </p:txBody>
+      </p:sp>
+      <p:sp>
+        <p:nvSpPr>
+          <p:cNvPr id="23" name="Text 20"/>
+          <p:cNvSpPr txBox="1"/>
+          <p:nvPr/>
+        </p:nvSpPr>
+        <p:spPr>
+          <a:xfrm>
+            <a:off x="7653528" y="2377440"/>
+            <a:ext cx="3968496" cy="256032"/>
+          </a:xfrm>
+          <a:prstGeom prst="rect">
+            <a:avLst/>
+          </a:prstGeom>
+          <a:noFill/>
+          <a:ln/>
+        </p:spPr>
+        <p:txBody>
+          <a:bodyPr wrap="square" lIns="0" tIns="0" rIns="0" bIns="0" rtlCol="0" anchor="ctr"/>
+          <a:lstStyle/>
+          <a:p>
+            <a:pPr indent="0" marL="0">
+              <a:buNone/>
+            </a:pPr>
+            <a:r>
+              <a:rPr lang="en-US" sz="1150" b="1" dirty="0">
+                <a:solidFill>
+                  <a:srgbClr val="B58B2A"/>
+                </a:solidFill>
+                <a:latin typeface="Calibri" pitchFamily="34" charset="0"/>
+                <a:ea typeface="Calibri" pitchFamily="34" charset="-122"/>
+                <a:cs typeface="Calibri" pitchFamily="34" charset="-120"/>
+              </a:rPr>
+              <a:t>効果とリスクの分け方</a:t>
+            </a:r>
+            <a:endParaRPr lang="en-US" sz="1150" dirty="0"/>
+          </a:p>
+        </p:txBody>
+      </p:sp>
+      <p:sp>
+        <p:nvSpPr>
+          <p:cNvPr id="24" name="Shape 21"/>
           <p:cNvSpPr/>
           <p:nvPr/>
         </p:nvSpPr>
         <p:spPr>
           <a:xfrm>
-            <a:off x="7287768" y="4343400"/>
-            <a:ext cx="4334256" cy="685800"/>
+            <a:off x="7653528" y="2670048"/>
+            <a:ext cx="3968496" cy="2404872"/>
           </a:xfrm>
           <a:prstGeom prst="roundRect">
             <a:avLst>
-              <a:gd name="adj" fmla="val 5333"/>
+              <a:gd name="adj" fmla="val 1521"/>
             </a:avLst>
           </a:prstGeom>
           <a:solidFill>
@@ -3533,14 +2857,14 @@
       </p:sp>
       <p:sp>
         <p:nvSpPr>
-          <p:cNvPr id="26" name="Text 22"/>
+          <p:cNvPr id="25" name="Text 22"/>
           <p:cNvSpPr txBox="1"/>
           <p:nvPr/>
         </p:nvSpPr>
         <p:spPr>
           <a:xfrm>
-            <a:off x="7424928" y="4389120"/>
-            <a:ext cx="4059936" cy="594360"/>
+            <a:off x="7818120" y="2761488"/>
+            <a:ext cx="3639312" cy="237744"/>
           </a:xfrm>
           <a:prstGeom prst="rect">
             <a:avLst/>
@@ -3553,8 +2877,47 @@
           <a:lstStyle/>
           <a:p>
             <a:pPr indent="0" marL="0">
+              <a:buNone/>
+            </a:pPr>
+            <a:r>
+              <a:rPr lang="en-US" sz="1050" b="1" dirty="0">
+                <a:solidFill>
+                  <a:srgbClr val="6D2E46"/>
+                </a:solidFill>
+                <a:latin typeface="Calibri" pitchFamily="34" charset="0"/>
+                <a:ea typeface="Calibri" pitchFamily="34" charset="-122"/>
+                <a:cs typeface="Calibri" pitchFamily="34" charset="-120"/>
+              </a:rPr>
+              <a:t>岸田様</a:t>
+            </a:r>
+            <a:endParaRPr lang="en-US" sz="1050" dirty="0"/>
+          </a:p>
+        </p:txBody>
+      </p:sp>
+      <p:sp>
+        <p:nvSpPr>
+          <p:cNvPr id="26" name="Text 23"/>
+          <p:cNvSpPr txBox="1"/>
+          <p:nvPr/>
+        </p:nvSpPr>
+        <p:spPr>
+          <a:xfrm>
+            <a:off x="7818120" y="2999232"/>
+            <a:ext cx="3639312" cy="502920"/>
+          </a:xfrm>
+          <a:prstGeom prst="rect">
+            <a:avLst/>
+          </a:prstGeom>
+          <a:noFill/>
+          <a:ln/>
+        </p:spPr>
+        <p:txBody>
+          <a:bodyPr wrap="square" lIns="0" tIns="0" rIns="0" bIns="0" rtlCol="0" anchor="t"/>
+          <a:lstStyle/>
+          <a:p>
+            <a:pPr indent="0" marL="0">
               <a:lnSpc>
-                <a:spcPts val="1200"/>
+                <a:spcPts val="1150"/>
               </a:lnSpc>
               <a:buNone/>
             </a:pPr>
@@ -3567,7 +2930,7 @@
                 <a:ea typeface="Calibri" pitchFamily="34" charset="-122"/>
                 <a:cs typeface="Calibri" pitchFamily="34" charset="-120"/>
               </a:rPr>
-              <a:t>報酬で払うと、会社の節税分とほぼ同じだけ岸田様の税金が増え、双方合計では得になりません。アーンアウトは株式対価を基本とし、退職金に振り替えられる部分だけを設計します。</a:t>
+              <a:t>株式対価と比べ約1,050万円のご負担増。ただし賞与で受け取る場合と比べると約5,600万円の節税は維持されます。</a:t>
             </a:r>
             <a:endParaRPr lang="en-US" sz="900" dirty="0"/>
           </a:p>
@@ -3575,18 +2938,180 @@
       </p:sp>
       <p:sp>
         <p:nvSpPr>
-          <p:cNvPr id="27" name="Shape 23"/>
+          <p:cNvPr id="27" name="Text 24"/>
+          <p:cNvSpPr txBox="1"/>
+          <p:nvPr/>
+        </p:nvSpPr>
+        <p:spPr>
+          <a:xfrm>
+            <a:off x="7818120" y="3529584"/>
+            <a:ext cx="3639312" cy="237744"/>
+          </a:xfrm>
+          <a:prstGeom prst="rect">
+            <a:avLst/>
+          </a:prstGeom>
+          <a:noFill/>
+          <a:ln/>
+        </p:spPr>
+        <p:txBody>
+          <a:bodyPr wrap="square" lIns="0" tIns="0" rIns="0" bIns="0" rtlCol="0" anchor="ctr"/>
+          <a:lstStyle/>
+          <a:p>
+            <a:pPr indent="0" marL="0">
+              <a:buNone/>
+            </a:pPr>
+            <a:r>
+              <a:rPr lang="en-US" sz="1050" b="1" dirty="0">
+                <a:solidFill>
+                  <a:srgbClr val="6D2E46"/>
+                </a:solidFill>
+                <a:latin typeface="Calibri" pitchFamily="34" charset="0"/>
+                <a:ea typeface="Calibri" pitchFamily="34" charset="-122"/>
+                <a:cs typeface="Calibri" pitchFamily="34" charset="-120"/>
+              </a:rPr>
+              <a:t>会社</a:t>
+            </a:r>
+            <a:endParaRPr lang="en-US" sz="1050" dirty="0"/>
+          </a:p>
+        </p:txBody>
+      </p:sp>
+      <p:sp>
+        <p:nvSpPr>
+          <p:cNvPr id="28" name="Text 25"/>
+          <p:cNvSpPr txBox="1"/>
+          <p:nvPr/>
+        </p:nvSpPr>
+        <p:spPr>
+          <a:xfrm>
+            <a:off x="7818120" y="3767328"/>
+            <a:ext cx="3639312" cy="502920"/>
+          </a:xfrm>
+          <a:prstGeom prst="rect">
+            <a:avLst/>
+          </a:prstGeom>
+          <a:noFill/>
+          <a:ln/>
+        </p:spPr>
+        <p:txBody>
+          <a:bodyPr wrap="square" lIns="0" tIns="0" rIns="0" bIns="0" rtlCol="0" anchor="t"/>
+          <a:lstStyle/>
+          <a:p>
+            <a:pPr indent="0" marL="0">
+              <a:lnSpc>
+                <a:spcPts val="1150"/>
+              </a:lnSpc>
+              <a:buNone/>
+            </a:pPr>
+            <a:r>
+              <a:rPr lang="en-US" sz="900" dirty="0">
+                <a:solidFill>
+                  <a:srgbClr val="1F1A1C"/>
+                </a:solidFill>
+                <a:latin typeface="Calibri" pitchFamily="34" charset="0"/>
+                <a:ea typeface="Calibri" pitchFamily="34" charset="-122"/>
+                <a:cs typeface="Calibri" pitchFamily="34" charset="-120"/>
+              </a:rPr>
+              <a:t>前払い分が損金となり、約7,740万円の税負担が軽くなります。</a:t>
+            </a:r>
+            <a:endParaRPr lang="en-US" sz="900" dirty="0"/>
+          </a:p>
+        </p:txBody>
+      </p:sp>
+      <p:sp>
+        <p:nvSpPr>
+          <p:cNvPr id="29" name="Text 26"/>
+          <p:cNvSpPr txBox="1"/>
+          <p:nvPr/>
+        </p:nvSpPr>
+        <p:spPr>
+          <a:xfrm>
+            <a:off x="7818120" y="4297680"/>
+            <a:ext cx="3639312" cy="237744"/>
+          </a:xfrm>
+          <a:prstGeom prst="rect">
+            <a:avLst/>
+          </a:prstGeom>
+          <a:noFill/>
+          <a:ln/>
+        </p:spPr>
+        <p:txBody>
+          <a:bodyPr wrap="square" lIns="0" tIns="0" rIns="0" bIns="0" rtlCol="0" anchor="ctr"/>
+          <a:lstStyle/>
+          <a:p>
+            <a:pPr indent="0" marL="0">
+              <a:buNone/>
+            </a:pPr>
+            <a:r>
+              <a:rPr lang="en-US" sz="1050" b="1" dirty="0">
+                <a:solidFill>
+                  <a:srgbClr val="6D2E46"/>
+                </a:solidFill>
+                <a:latin typeface="Calibri" pitchFamily="34" charset="0"/>
+                <a:ea typeface="Calibri" pitchFamily="34" charset="-122"/>
+                <a:cs typeface="Calibri" pitchFamily="34" charset="-120"/>
+              </a:rPr>
+              <a:t>税務リスク</a:t>
+            </a:r>
+            <a:endParaRPr lang="en-US" sz="1050" dirty="0"/>
+          </a:p>
+        </p:txBody>
+      </p:sp>
+      <p:sp>
+        <p:nvSpPr>
+          <p:cNvPr id="30" name="Text 27"/>
+          <p:cNvSpPr txBox="1"/>
+          <p:nvPr/>
+        </p:nvSpPr>
+        <p:spPr>
+          <a:xfrm>
+            <a:off x="7818120" y="4535424"/>
+            <a:ext cx="3639312" cy="502920"/>
+          </a:xfrm>
+          <a:prstGeom prst="rect">
+            <a:avLst/>
+          </a:prstGeom>
+          <a:noFill/>
+          <a:ln/>
+        </p:spPr>
+        <p:txBody>
+          <a:bodyPr wrap="square" lIns="0" tIns="0" rIns="0" bIns="0" rtlCol="0" anchor="t"/>
+          <a:lstStyle/>
+          <a:p>
+            <a:pPr indent="0" marL="0">
+              <a:lnSpc>
+                <a:spcPts val="1150"/>
+              </a:lnSpc>
+              <a:buNone/>
+            </a:pPr>
+            <a:r>
+              <a:rPr lang="en-US" sz="900" dirty="0">
+                <a:solidFill>
+                  <a:srgbClr val="1F1A1C"/>
+                </a:solidFill>
+                <a:latin typeface="Calibri" pitchFamily="34" charset="0"/>
+                <a:ea typeface="Calibri" pitchFamily="34" charset="-122"/>
+                <a:cs typeface="Calibri" pitchFamily="34" charset="-120"/>
+              </a:rPr>
+              <a:t>賞与を含めた月額で算定するため、否認された場合の追徴（約7,000〜7,500万円）は双方で折半し、最終契約に定めます。</a:t>
+            </a:r>
+            <a:endParaRPr lang="en-US" sz="900" dirty="0"/>
+          </a:p>
+        </p:txBody>
+      </p:sp>
+      <p:sp>
+        <p:nvSpPr>
+          <p:cNvPr id="31" name="Shape 28"/>
           <p:cNvSpPr/>
           <p:nvPr/>
         </p:nvSpPr>
         <p:spPr>
           <a:xfrm>
             <a:off x="566928" y="5230368"/>
-            <a:ext cx="11055096" cy="1078992"/>
+            <a:ext cx="11055096" cy="1097280"/>
           </a:xfrm>
           <a:prstGeom prst="roundRect">
             <a:avLst>
-              <a:gd name="adj" fmla="val 4237"/>
+              <a:gd name="adj" fmla="val 4167"/>
             </a:avLst>
           </a:prstGeom>
           <a:solidFill>
@@ -3602,14 +3127,14 @@
       </p:sp>
       <p:sp>
         <p:nvSpPr>
-          <p:cNvPr id="28" name="Text 24"/>
+          <p:cNvPr id="32" name="Text 29"/>
           <p:cNvSpPr txBox="1"/>
           <p:nvPr/>
         </p:nvSpPr>
         <p:spPr>
           <a:xfrm>
             <a:off x="795528" y="5303520"/>
-            <a:ext cx="4572000" cy="256032"/>
+            <a:ext cx="5120640" cy="237744"/>
           </a:xfrm>
           <a:prstGeom prst="rect">
             <a:avLst/>
@@ -3625,7 +3150,163 @@
               <a:buNone/>
             </a:pPr>
             <a:r>
-              <a:rPr lang="en-US" sz="1150" b="1" dirty="0">
+              <a:rPr lang="en-US" sz="1100" b="1" dirty="0">
+                <a:solidFill>
+                  <a:srgbClr val="6D2E46"/>
+                </a:solidFill>
+                <a:latin typeface="Calibri" pitchFamily="34" charset="0"/>
+                <a:ea typeface="Calibri" pitchFamily="34" charset="-122"/>
+                <a:cs typeface="Calibri" pitchFamily="34" charset="-120"/>
+              </a:rPr>
+              <a:t>前提となる条件</a:t>
+            </a:r>
+            <a:endParaRPr lang="en-US" sz="1100" dirty="0"/>
+          </a:p>
+        </p:txBody>
+      </p:sp>
+      <p:sp>
+        <p:nvSpPr>
+          <p:cNvPr id="33" name="Text 30"/>
+          <p:cNvSpPr txBox="1"/>
+          <p:nvPr/>
+        </p:nvSpPr>
+        <p:spPr>
+          <a:xfrm>
+            <a:off x="795528" y="5559552"/>
+            <a:ext cx="6035040" cy="237744"/>
+          </a:xfrm>
+          <a:prstGeom prst="rect">
+            <a:avLst/>
+          </a:prstGeom>
+          <a:noFill/>
+          <a:ln/>
+        </p:spPr>
+        <p:txBody>
+          <a:bodyPr wrap="square" lIns="0" tIns="0" rIns="0" bIns="0" rtlCol="0" anchor="ctr"/>
+          <a:lstStyle/>
+          <a:p>
+            <a:pPr indent="0" marL="0">
+              <a:buNone/>
+            </a:pPr>
+            <a:r>
+              <a:rPr lang="en-US" sz="900" dirty="0">
+                <a:solidFill>
+                  <a:srgbClr val="1F1A1C"/>
+                </a:solidFill>
+                <a:latin typeface="Calibri" pitchFamily="34" charset="0"/>
+                <a:ea typeface="Calibri" pitchFamily="34" charset="-122"/>
+                <a:cs typeface="Calibri" pitchFamily="34" charset="-120"/>
+              </a:rPr>
+              <a:t>・決済時に代表取締役を退任し、取締役・料理長としてご在任（報酬は年2,000万円）</a:t>
+            </a:r>
+            <a:endParaRPr lang="en-US" sz="900" dirty="0"/>
+          </a:p>
+        </p:txBody>
+      </p:sp>
+      <p:sp>
+        <p:nvSpPr>
+          <p:cNvPr id="34" name="Text 31"/>
+          <p:cNvSpPr txBox="1"/>
+          <p:nvPr/>
+        </p:nvSpPr>
+        <p:spPr>
+          <a:xfrm>
+            <a:off x="795528" y="5797296"/>
+            <a:ext cx="6035040" cy="237744"/>
+          </a:xfrm>
+          <a:prstGeom prst="rect">
+            <a:avLst/>
+          </a:prstGeom>
+          <a:noFill/>
+          <a:ln/>
+        </p:spPr>
+        <p:txBody>
+          <a:bodyPr wrap="square" lIns="0" tIns="0" rIns="0" bIns="0" rtlCol="0" anchor="ctr"/>
+          <a:lstStyle/>
+          <a:p>
+            <a:pPr indent="0" marL="0">
+              <a:buNone/>
+            </a:pPr>
+            <a:r>
+              <a:rPr lang="en-US" sz="900" dirty="0">
+                <a:solidFill>
+                  <a:srgbClr val="1F1A1C"/>
+                </a:solidFill>
+                <a:latin typeface="Calibri" pitchFamily="34" charset="0"/>
+                <a:ea typeface="Calibri" pitchFamily="34" charset="-122"/>
+                <a:cs typeface="Calibri" pitchFamily="34" charset="-120"/>
+              </a:rPr>
+              <a:t>・算定：賞与を含む実質月額 約855万円×在任20年×功績倍率 約1.3（社長の目安3.0の半分以下）</a:t>
+            </a:r>
+            <a:endParaRPr lang="en-US" sz="900" dirty="0"/>
+          </a:p>
+        </p:txBody>
+      </p:sp>
+      <p:sp>
+        <p:nvSpPr>
+          <p:cNvPr id="35" name="Text 32"/>
+          <p:cNvSpPr txBox="1"/>
+          <p:nvPr/>
+        </p:nvSpPr>
+        <p:spPr>
+          <a:xfrm>
+            <a:off x="795528" y="6035040"/>
+            <a:ext cx="6035040" cy="237744"/>
+          </a:xfrm>
+          <a:prstGeom prst="rect">
+            <a:avLst/>
+          </a:prstGeom>
+          <a:noFill/>
+          <a:ln/>
+        </p:spPr>
+        <p:txBody>
+          <a:bodyPr wrap="square" lIns="0" tIns="0" rIns="0" bIns="0" rtlCol="0" anchor="ctr"/>
+          <a:lstStyle/>
+          <a:p>
+            <a:pPr indent="0" marL="0">
+              <a:buNone/>
+            </a:pPr>
+            <a:r>
+              <a:rPr lang="en-US" sz="900" dirty="0">
+                <a:solidFill>
+                  <a:srgbClr val="1F1A1C"/>
+                </a:solidFill>
+                <a:latin typeface="Calibri" pitchFamily="34" charset="0"/>
+                <a:ea typeface="Calibri" pitchFamily="34" charset="-122"/>
+                <a:cs typeface="Calibri" pitchFamily="34" charset="-120"/>
+              </a:rPr>
+              <a:t>・アーンアウトは株式対価のまま（報酬で払っても双方合計では得にならないため）</a:t>
+            </a:r>
+            <a:endParaRPr lang="en-US" sz="900" dirty="0"/>
+          </a:p>
+        </p:txBody>
+      </p:sp>
+      <p:sp>
+        <p:nvSpPr>
+          <p:cNvPr id="36" name="Text 33"/>
+          <p:cNvSpPr txBox="1"/>
+          <p:nvPr/>
+        </p:nvSpPr>
+        <p:spPr>
+          <a:xfrm>
+            <a:off x="7013448" y="5303520"/>
+            <a:ext cx="4114800" cy="237744"/>
+          </a:xfrm>
+          <a:prstGeom prst="rect">
+            <a:avLst/>
+          </a:prstGeom>
+          <a:noFill/>
+          <a:ln/>
+        </p:spPr>
+        <p:txBody>
+          <a:bodyPr wrap="square" lIns="0" tIns="0" rIns="0" bIns="0" rtlCol="0" anchor="ctr"/>
+          <a:lstStyle/>
+          <a:p>
+            <a:pPr indent="0" marL="0">
+              <a:buNone/>
+            </a:pPr>
+            <a:r>
+              <a:rPr lang="en-US" sz="1100" b="1" dirty="0">
                 <a:solidFill>
                   <a:srgbClr val="6D2E46"/>
                 </a:solidFill>
@@ -3635,20 +3316,20 @@
               </a:rPr>
               <a:t>本日ご相談したいこと</a:t>
             </a:r>
-            <a:endParaRPr lang="en-US" sz="1150" dirty="0"/>
+            <a:endParaRPr lang="en-US" sz="1100" dirty="0"/>
           </a:p>
         </p:txBody>
       </p:sp>
       <p:sp>
         <p:nvSpPr>
-          <p:cNvPr id="29" name="Text 25"/>
+          <p:cNvPr id="37" name="Text 34"/>
           <p:cNvSpPr txBox="1"/>
           <p:nvPr/>
         </p:nvSpPr>
         <p:spPr>
           <a:xfrm>
-            <a:off x="795528" y="5596128"/>
-            <a:ext cx="10597896" cy="219456"/>
+            <a:off x="7013448" y="5559552"/>
+            <a:ext cx="4379976" cy="237744"/>
           </a:xfrm>
           <a:prstGeom prst="rect">
             <a:avLst/>
@@ -3664,7 +3345,7 @@
               <a:buNone/>
             </a:pPr>
             <a:r>
-              <a:rPr lang="en-US" sz="1000" dirty="0">
+              <a:rPr lang="en-US" sz="950" dirty="0">
                 <a:solidFill>
                   <a:srgbClr val="1F1A1C"/>
                 </a:solidFill>
@@ -3672,22 +3353,22 @@
                 <a:ea typeface="Calibri" pitchFamily="34" charset="-122"/>
                 <a:cs typeface="Calibri" pitchFamily="34" charset="-120"/>
               </a:rPr>
-              <a:t>1．役員退職金を活用する方向性について、ご賛同いただけるか</a:t>
+              <a:t>1．前払い分を役員退職金に振り替える方向性</a:t>
             </a:r>
-            <a:endParaRPr lang="en-US" sz="1000" dirty="0"/>
+            <a:endParaRPr lang="en-US" sz="950" dirty="0"/>
           </a:p>
         </p:txBody>
       </p:sp>
       <p:sp>
         <p:nvSpPr>
-          <p:cNvPr id="30" name="Text 26"/>
+          <p:cNvPr id="38" name="Text 35"/>
           <p:cNvSpPr txBox="1"/>
           <p:nvPr/>
         </p:nvSpPr>
         <p:spPr>
           <a:xfrm>
-            <a:off x="795528" y="5815584"/>
-            <a:ext cx="10597896" cy="219456"/>
+            <a:off x="7013448" y="5797296"/>
+            <a:ext cx="4379976" cy="237744"/>
           </a:xfrm>
           <a:prstGeom prst="rect">
             <a:avLst/>
@@ -3703,7 +3384,7 @@
               <a:buNone/>
             </a:pPr>
             <a:r>
-              <a:rPr lang="en-US" sz="1000" dirty="0">
+              <a:rPr lang="en-US" sz="950" dirty="0">
                 <a:solidFill>
                   <a:srgbClr val="1F1A1C"/>
                 </a:solidFill>
@@ -3711,22 +3392,22 @@
                 <a:ea typeface="Calibri" pitchFamily="34" charset="-122"/>
                 <a:cs typeface="Calibri" pitchFamily="34" charset="-120"/>
               </a:rPr>
-              <a:t>2．支給時期（決済時か、最終ご退任時か）と、財源とする部分（前払い分またはアーンアウトの一部）</a:t>
+              <a:t>2．否認された場合の追徴を折半する考え方</a:t>
             </a:r>
-            <a:endParaRPr lang="en-US" sz="1000" dirty="0"/>
+            <a:endParaRPr lang="en-US" sz="950" dirty="0"/>
           </a:p>
         </p:txBody>
       </p:sp>
       <p:sp>
         <p:nvSpPr>
-          <p:cNvPr id="31" name="Text 27"/>
+          <p:cNvPr id="39" name="Text 36"/>
           <p:cNvSpPr txBox="1"/>
           <p:nvPr/>
         </p:nvSpPr>
         <p:spPr>
           <a:xfrm>
-            <a:off x="795528" y="6035040"/>
-            <a:ext cx="10597896" cy="219456"/>
+            <a:off x="7013448" y="6035040"/>
+            <a:ext cx="4379976" cy="237744"/>
           </a:xfrm>
           <a:prstGeom prst="rect">
             <a:avLst/>
@@ -3742,7 +3423,7 @@
               <a:buNone/>
             </a:pPr>
             <a:r>
-              <a:rPr lang="en-US" sz="1000" dirty="0">
+              <a:rPr lang="en-US" sz="950" dirty="0">
                 <a:solidFill>
                   <a:srgbClr val="1F1A1C"/>
                 </a:solidFill>
@@ -3750,15 +3431,15 @@
                 <a:ea typeface="Calibri" pitchFamily="34" charset="-122"/>
                 <a:cs typeface="Calibri" pitchFamily="34" charset="-120"/>
               </a:rPr>
-              <a:t>3．双方の税理士による確認の進め方と、最終契約書への反映時期</a:t>
+              <a:t>3．双方の税理士による確認と、最終契約への反映</a:t>
             </a:r>
-            <a:endParaRPr lang="en-US" sz="1000" dirty="0"/>
+            <a:endParaRPr lang="en-US" sz="950" dirty="0"/>
           </a:p>
         </p:txBody>
       </p:sp>
       <p:sp>
         <p:nvSpPr>
-          <p:cNvPr id="32" name="Text 28"/>
+          <p:cNvPr id="40" name="Text 37"/>
           <p:cNvSpPr txBox="1"/>
           <p:nvPr/>
         </p:nvSpPr>
